--- a/lecons/F2T/03_F2T_L1_P3_Equatorial_Resources.pptx
+++ b/lecons/F2T/03_F2T_L1_P3_Equatorial_Resources.pptx
@@ -58,9 +58,11 @@
     <p:sldId id="306" r:id="rId52"/>
     <p:sldId id="307" r:id="rId53"/>
     <p:sldId id="308" r:id="rId54"/>
+    <p:sldId id="309" r:id="rId55"/>
+    <p:sldId id="310" r:id="rId56"/>
   </p:sldIdLst>
   <p:notesMasterIdLst>
-    <p:notesMasterId r:id="rId55"/>
+    <p:notesMasterId r:id="rId57"/>
   </p:notesMasterIdLst>
   <p:sldSz cx="12192000" cy="6858000"/>
   <p:notesSz cx="6858000" cy="12192000"/>
@@ -642,7 +644,7 @@
           <a:p>
             <a:r>
               <a:rPr lang="en-US" dirty="0"/>
-              <a:t>Listen carefully to this situation from real life. In the port of Kribi, Amina sees logs, bags of cocoa and tanks of oil waiting to be loaded on ships. Her father tells her that all these products come from the forest region of Cameroon. Think about it, because I am going to ask you some questions.</a:t>
+              <a:t>Listen carefully to this situation from real life. In the port of Kribi, Amina sees logs, bags of cocoa and tanks of oil waiting for ships. Her father says that they all come from the forest region of Cameroon. Amina asks: "What riches does the forest region have, and how do people get them?" Think about it, because I am going to ask you some questions.</a:t>
             </a:r>
             <a:endParaRPr lang="en-US" dirty="0"/>
           </a:p>
@@ -818,7 +820,7 @@
           <a:p>
             <a:r>
               <a:rPr lang="en-US" dirty="0"/>
-              <a:t>Good. Amina wants to know the resources of the forest region and how they are exploited.</a:t>
+              <a:t>Good. Amina does not know the resources of the forest region and how they are exploited.</a:t>
             </a:r>
             <a:endParaRPr lang="en-US" dirty="0"/>
           </a:p>
@@ -906,7 +908,7 @@
           <a:p>
             <a:r>
               <a:rPr lang="en-US" dirty="0"/>
-              <a:t>Question 2: Name three products Amina sees. Think for a moment, then raise your hand to answer.</a:t>
+              <a:t>Question 2: Name three products seen in the port. Think for a moment, then raise your hand to answer.</a:t>
             </a:r>
             <a:endParaRPr lang="en-US" dirty="0"/>
           </a:p>
@@ -994,7 +996,7 @@
           <a:p>
             <a:r>
               <a:rPr lang="en-US" dirty="0"/>
-              <a:t>Good. Logs (timber), cocoa and oil.</a:t>
+              <a:t>Good. Logs, cocoa and oil.</a:t>
             </a:r>
             <a:endParaRPr lang="en-US" dirty="0"/>
           </a:p>
@@ -1082,7 +1084,7 @@
           <a:p>
             <a:r>
               <a:rPr lang="en-US" dirty="0"/>
-              <a:t>Question 3: Where do these products go? Think for a moment, then raise your hand to answer.</a:t>
+              <a:t>Question 3: Where do they come from? Think for a moment, then raise your hand to answer.</a:t>
             </a:r>
             <a:endParaRPr lang="en-US" dirty="0"/>
           </a:p>
@@ -1170,7 +1172,7 @@
           <a:p>
             <a:r>
               <a:rPr lang="en-US" dirty="0"/>
-              <a:t>Good. They are exported to other countries by ship.</a:t>
+              <a:t>Good. From the forest (Equatorial) region of Cameroon.</a:t>
             </a:r>
             <a:endParaRPr lang="en-US" dirty="0"/>
           </a:p>
@@ -1434,7 +1436,7 @@
           <a:p>
             <a:r>
               <a:rPr lang="en-US" dirty="0"/>
-              <a:t>Activity 1. Look carefully at this picture: a lorry carries logs in the East Region of Cameroon. Observe every detail before I ask the question.</a:t>
+              <a:t>Activity 1. Look carefully at this picture: a lorry with logs. Observe every detail before I ask the question.</a:t>
             </a:r>
             <a:endParaRPr lang="en-US" dirty="0"/>
           </a:p>
@@ -1610,7 +1612,7 @@
           <a:p>
             <a:r>
               <a:rPr lang="en-US" dirty="0"/>
-              <a:t>Here is the question for Activity 1: Which resource is shown? How is it exploited? Take one minute to think and write your answer in your rough notebook.</a:t>
+              <a:t>Here is the question for Activity 1: Which resource of the forest is shown here? Take one minute to think and write your answer in your rough notebook.</a:t>
             </a:r>
             <a:endParaRPr lang="en-US" dirty="0"/>
           </a:p>
@@ -1698,7 +1700,7 @@
           <a:p>
             <a:r>
               <a:rPr lang="en-US" dirty="0"/>
-              <a:t>Let us check the answer together. Timber. Trees are cut with chainsaws and the logs are carried by lorries to sawmills and ports.</a:t>
+              <a:t>Let us check the answer together. Timber (wood).</a:t>
             </a:r>
             <a:endParaRPr lang="en-US" dirty="0"/>
           </a:p>
@@ -1786,7 +1788,7 @@
           <a:p>
             <a:r>
               <a:rPr lang="en-US" dirty="0"/>
-              <a:t>Activity 2. Look carefully at this picture: a dam and its lake. Observe every detail before I ask the question.</a:t>
+              <a:t>Activity 2. Look carefully at this picture: a crop of the forest region. Observe every detail before I ask the question.</a:t>
             </a:r>
             <a:endParaRPr lang="en-US" dirty="0"/>
           </a:p>
@@ -1874,7 +1876,7 @@
           <a:p>
             <a:r>
               <a:rPr lang="en-US" dirty="0"/>
-              <a:t>Here is the question for Activity 2: How are the big rivers of the forest region, like the Sanaga, used? Take one minute to think and write your answer in your rough notebook.</a:t>
+              <a:t>Here is the question for Activity 2: Which crop is this? Take one minute to think and write your answer in your rough notebook.</a:t>
             </a:r>
             <a:endParaRPr lang="en-US" dirty="0"/>
           </a:p>
@@ -1962,7 +1964,7 @@
           <a:p>
             <a:r>
               <a:rPr lang="en-US" dirty="0"/>
-              <a:t>Let us check the answer together. Dams produce hydro-electricity, as at Edéa and Song Loulou, and people fish in the rivers.</a:t>
+              <a:t>Let us check the answer together. Cocoa.</a:t>
             </a:r>
             <a:endParaRPr lang="en-US" dirty="0"/>
           </a:p>
@@ -2050,7 +2052,7 @@
           <a:p>
             <a:r>
               <a:rPr lang="en-US" dirty="0"/>
-              <a:t>Activity 3. Look carefully at this picture: artisanal gold mining. Observe every detail before I ask the question.</a:t>
+              <a:t>Activity 3. Look carefully at this picture: a dam. Observe every detail before I ask the question.</a:t>
             </a:r>
             <a:endParaRPr lang="en-US" dirty="0"/>
           </a:p>
@@ -2138,7 +2140,7 @@
           <a:p>
             <a:r>
               <a:rPr lang="en-US" dirty="0"/>
-              <a:t>Here is the question for Activity 3: Name two minerals of the forest region of Cameroon and how they are exploited. Take one minute to think and write your answer in your rough notebook.</a:t>
+              <a:t>Here is the question for Activity 3: How is the water of big rivers like the Sanaga used to make electricity? Take one minute to think and write your answer in your rough notebook.</a:t>
             </a:r>
             <a:endParaRPr lang="en-US" dirty="0"/>
           </a:p>
@@ -2226,7 +2228,7 @@
           <a:p>
             <a:r>
               <a:rPr lang="en-US" dirty="0"/>
-              <a:t>Let us check the answer together. Oil is drilled under the sea near Kribi and Limbe; gold is dug and washed by hand in the East.</a:t>
+              <a:t>Let us check the answer together. Dams are built, as at Edéa and Song Loulou.</a:t>
             </a:r>
             <a:endParaRPr lang="en-US" dirty="0"/>
           </a:p>
@@ -2314,7 +2316,7 @@
           <a:p>
             <a:r>
               <a:rPr lang="en-US" dirty="0"/>
-              <a:t>Activity 4. Look carefully at this picture: a farmer dries cocoa beans in the sun. Observe every detail before I ask the question.</a:t>
+              <a:t>Activity 4. Look carefully at this picture: people digging for a mineral. Observe every detail before I ask the question.</a:t>
             </a:r>
             <a:endParaRPr lang="en-US" dirty="0"/>
           </a:p>
@@ -2402,7 +2404,7 @@
           <a:p>
             <a:r>
               <a:rPr lang="en-US" dirty="0"/>
-              <a:t>Here is the question for Activity 4: Which crop is this? Why does it grow well in the forest region? Take one minute to think and write your answer in your rough notebook.</a:t>
+              <a:t>Here is the question for Activity 4: How is gold exploited in the East of Cameroon? Take one minute to think and write your answer in your rough notebook.</a:t>
             </a:r>
             <a:endParaRPr lang="en-US" dirty="0"/>
           </a:p>
@@ -2578,7 +2580,7 @@
           <a:p>
             <a:r>
               <a:rPr lang="en-US" dirty="0"/>
-              <a:t>Let us check the answer together. Cocoa. It needs heat and rain all year, like the equatorial climate.</a:t>
+              <a:t>Let us check the answer together. It is dug and washed by hand.</a:t>
             </a:r>
             <a:endParaRPr lang="en-US" dirty="0"/>
           </a:p>
@@ -2666,7 +2668,7 @@
           <a:p>
             <a:r>
               <a:rPr lang="en-US" dirty="0"/>
-              <a:t>Activity 5. Look carefully at this picture: elephants in a national park. Observe every detail before I ask the question.</a:t>
+              <a:t>Activity 5. Look carefully at this picture: elephants. Observe every detail before I ask the question.</a:t>
             </a:r>
             <a:endParaRPr lang="en-US" dirty="0"/>
           </a:p>
@@ -2754,7 +2756,7 @@
           <a:p>
             <a:r>
               <a:rPr lang="en-US" dirty="0"/>
-              <a:t>Here is the question for Activity 5: How is the wildlife of the forest exploited? Take one minute to think and write your answer in your rough notebook.</a:t>
+              <a:t>Here is the question for Activity 5: How can wild animals bring money without killing them? Take one minute to think and write your answer in your rough notebook.</a:t>
             </a:r>
             <a:endParaRPr lang="en-US" dirty="0"/>
           </a:p>
@@ -2842,7 +2844,7 @@
           <a:p>
             <a:r>
               <a:rPr lang="en-US" dirty="0"/>
-              <a:t>Let us check the answer together. By tourism in national parks like the Dja and Lobéké, and by hunting, which must be controlled.</a:t>
+              <a:t>Let us check the answer together. Through tourism in national parks.</a:t>
             </a:r>
             <a:endParaRPr lang="en-US" dirty="0"/>
           </a:p>
@@ -3106,7 +3108,7 @@
           <a:p>
             <a:r>
               <a:rPr lang="en-US" dirty="0"/>
-              <a:t>Let us copy Types of Resources. The Equatorial region has the following resources. On this slide we have Forest and Water. Write each point on a new line, with the key term first, and explain it in your own words when we revise. When you finish, we go to the next slide.</a:t>
+              <a:t>Let us copy Types of Resources. The Equatorial region has the following resources. Copy the point on Forest on the left, then draw the diagram on the right: timber. Give it a title and label it clearly.</a:t>
             </a:r>
             <a:endParaRPr lang="en-US" dirty="0"/>
           </a:p>
@@ -3194,7 +3196,7 @@
           <a:p>
             <a:r>
               <a:rPr lang="en-US" dirty="0"/>
-              <a:t>We continue with Types of Resources. On this slide we have Minerals, Farmland and Wildlife. Write each point on a new line, with the key term first, and explain it in your own words when we revise.</a:t>
+              <a:t>We continue with Types of Resources. On this slide we have Water and Minerals. Write each point on a new line, with the key term first, and explain it in your own words when we revise.</a:t>
             </a:r>
             <a:endParaRPr lang="en-US" dirty="0"/>
           </a:p>
@@ -3282,7 +3284,7 @@
           <a:p>
             <a:r>
               <a:rPr lang="en-US" dirty="0"/>
-              <a:t>Let us copy Methods of Exploitation. These resources are exploited in the following ways. On this slide we have Timber. Write each point on a new line, with the key term first, and explain it in your own words when we revise. When you finish, we go to the next slide.</a:t>
+              <a:t>Copy the point on Fertile land on the left, then draw the diagram on the right: cocoa. Give it a title and label it clearly.</a:t>
             </a:r>
             <a:endParaRPr lang="en-US" dirty="0"/>
           </a:p>
@@ -3370,7 +3372,7 @@
           <a:p>
             <a:r>
               <a:rPr lang="en-US" dirty="0"/>
-              <a:t>We continue with Methods of Exploitation. On this slide we have Water and Minerals. Write each point on a new line, with the key term first, and explain it in your own words when we revise. When you finish, we go to the next slide.</a:t>
+              <a:t>We continue with Types of Resources. On this slide we have Wildlife. Write each point on a new line, with the key term first, and explain it in your own words when we revise.</a:t>
             </a:r>
             <a:endParaRPr lang="en-US" dirty="0"/>
           </a:p>
@@ -3546,7 +3548,7 @@
           <a:p>
             <a:r>
               <a:rPr lang="en-US" dirty="0"/>
-              <a:t>We continue with Methods of Exploitation. On this slide we have Farmland and Wildlife. Write each point on a new line, with the key term first, and explain it in your own words when we revise.</a:t>
+              <a:t>Let us copy Methods of Exploitation. These resources are exploited as follows. On this slide we have Timber and Water. Write each point on a new line, with the key term first, and explain it in your own words when we revise.</a:t>
             </a:r>
             <a:endParaRPr lang="en-US" dirty="0"/>
           </a:p>
@@ -3634,7 +3636,7 @@
           <a:p>
             <a:r>
               <a:rPr lang="en-US" dirty="0"/>
-              <a:t>Now let us check what you have understood. Question 1: Name four resources of the Equatorial region. Answer in your exercise book.</a:t>
+              <a:t>Copy the point on Minerals on the left, then draw the diagram on the right: gold mining. Give it a title and label it clearly.</a:t>
             </a:r>
             <a:endParaRPr lang="en-US" dirty="0"/>
           </a:p>
@@ -3722,7 +3724,7 @@
           <a:p>
             <a:r>
               <a:rPr lang="en-US" dirty="0"/>
-              <a:t>The expected answer is: timber, water, minerals (oil, gold), farmland and wildlife. If you got it right, well done.</a:t>
+              <a:t>We continue with Methods of Exploitation. On this slide we have Farmland and Wildlife. Write each point on a new line, with the key term first, and explain it in your own words when we revise.</a:t>
             </a:r>
             <a:endParaRPr lang="en-US" dirty="0"/>
           </a:p>
@@ -3810,7 +3812,7 @@
           <a:p>
             <a:r>
               <a:rPr lang="en-US" dirty="0"/>
-              <a:t>Now let us check what you have understood. Question 2: How is timber exploited? Answer in your exercise book.</a:t>
+              <a:t>Now let us check what you have understood. Question 1: Name four resources of the Equatorial region. Answer in your exercise book.</a:t>
             </a:r>
             <a:endParaRPr lang="en-US" dirty="0"/>
           </a:p>
@@ -3898,7 +3900,7 @@
           <a:p>
             <a:r>
               <a:rPr lang="en-US" dirty="0"/>
-              <a:t>The expected answer is: trees are cut with chainsaws, carried by lorries and sawn in sawmills or exported. If you got it right, well done.</a:t>
+              <a:t>The expected answer is: timber, water, minerals (oil, gold), farmland and wildlife. If you got it right, well done.</a:t>
             </a:r>
             <a:endParaRPr lang="en-US" dirty="0"/>
           </a:p>
@@ -3986,7 +3988,7 @@
           <a:p>
             <a:r>
               <a:rPr lang="en-US" dirty="0"/>
-              <a:t>Take your time to copy this part; we will continue together.</a:t>
+              <a:t>Now let us check what you have understood. Question 2: How is timber exploited? Answer in your exercise book.</a:t>
             </a:r>
             <a:endParaRPr lang="en-US" dirty="0"/>
           </a:p>
@@ -4074,7 +4076,7 @@
           <a:p>
             <a:r>
               <a:rPr lang="en-US" dirty="0"/>
-              <a:t>For those who need more practice, fill in the blanks in your exercise book. The answers are: number 1, timber; number 2, Sanaga; number 3, Kribi.</a:t>
+              <a:t>The expected answer is: trees are cut with chainsaws, carried by lorries and sawn in sawmills or exported. If you got it right, well done.</a:t>
             </a:r>
             <a:endParaRPr lang="en-US" dirty="0"/>
           </a:p>
@@ -4162,7 +4164,7 @@
           <a:p>
             <a:r>
               <a:rPr lang="en-US" dirty="0"/>
-              <a:t>For your homework: Ask a farmer or a trader what crops come from the forest region of Cameroon. Write three food crops and two cash crops. We shall correct it at the beginning of our next lesson.</a:t>
+              <a:t>Take your time to copy this part; we will continue together.</a:t>
             </a:r>
             <a:endParaRPr lang="en-US" dirty="0"/>
           </a:p>
@@ -4250,7 +4252,7 @@
           <a:p>
             <a:r>
               <a:rPr lang="en-US" dirty="0"/>
-              <a:t>Our next lesson will be on Lesson 1 (Part 4): The Equatorial Region: Human Activities (Farming, Lumbering, Hunting and Others). Thank you for your attention, and see you next time.</a:t>
+              <a:t>For those who need more practice, fill in the blanks in your exercise book. The answers are: number 1, timber; number 2, Sanaga; number 3, Kribi.</a:t>
             </a:r>
             <a:endParaRPr lang="en-US" dirty="0"/>
           </a:p>
@@ -4338,7 +4340,7 @@
           <a:p>
             <a:r>
               <a:rPr lang="en-US" dirty="0"/>
-              <a:t>Let us play the bilingual game. I say a word in English, and you give me the French word. Then we do the reverse.</a:t>
+              <a:t>For your homework: Ask a farmer or a trader what crops come from the forest region of Cameroon. Write three food crops and two cash crops. We shall correct it at the beginning of our next lesson.</a:t>
             </a:r>
             <a:endParaRPr lang="en-US" dirty="0"/>
           </a:p>
@@ -4514,7 +4516,7 @@
           <a:p>
             <a:r>
               <a:rPr lang="en-US" dirty="0"/>
-              <a:t>I record this information in the official logbook of the class after the lesson.</a:t>
+              <a:t>Our next lesson will be on Lesson 1 (Part 4): The Equatorial Region: Human Activities (Farming, Lumbering, Hunting and Others). Thank you for your attention, and see you next time.</a:t>
             </a:r>
             <a:endParaRPr lang="en-US" dirty="0"/>
           </a:p>
@@ -4602,7 +4604,7 @@
           <a:p>
             <a:r>
               <a:rPr lang="en-US" dirty="0"/>
-              <a:t>I complete the second page of the logbook: the matter taught, the evaluation, the homework and the attendance.</a:t>
+              <a:t>Let us play the bilingual game. I say a word in English, and you give me the French word. Then we do the reverse.</a:t>
             </a:r>
             <a:endParaRPr lang="en-US" dirty="0"/>
           </a:p>
@@ -4690,7 +4692,7 @@
           <a:p>
             <a:r>
               <a:rPr lang="en-US" dirty="0"/>
-              <a:t>This slide is for me, the teacher: it gives the timing of the lesson and what to do if the projector is not available.</a:t>
+              <a:t>I record this information in the official logbook of the class after the lesson.</a:t>
             </a:r>
             <a:endParaRPr lang="en-US" dirty="0"/>
           </a:p>
@@ -4778,7 +4780,7 @@
           <a:p>
             <a:r>
               <a:rPr lang="en-US" dirty="0"/>
-              <a:t>These are the references and picture credits used to prepare this lesson.</a:t>
+              <a:t>I complete the second page of the logbook: the matter taught, the evaluation, the homework and the attendance.</a:t>
             </a:r>
             <a:endParaRPr lang="en-US" dirty="0"/>
           </a:p>
@@ -4802,6 +4804,182 @@
             <a:fld id="{F7021451-1387-4CA6-816F-3879F97B5CBC}" type="slidenum">
               <a:rPr lang="en-US"/>
               <a:t>53</a:t>
+            </a:fld>
+            <a:endParaRPr lang="en-US"/>
+          </a:p>
+        </p:txBody>
+      </p:sp>
+    </p:spTree>
+    <p:extLst>
+      <p:ext uri="{BB962C8B-B14F-4D97-AF65-F5344CB8AC3E}">
+        <p14:creationId xmlns:p14="http://schemas.microsoft.com/office/powerpoint/2010/main" val="1024086991"/>
+      </p:ext>
+    </p:extLst>
+  </p:cSld>
+  <p:clrMapOvr>
+    <a:masterClrMapping/>
+  </p:clrMapOvr>
+</p:notes>
+</file>
+
+<file path=ppt/notesSlides/notesSlide54.xml><?xml version="1.0" encoding="utf-8"?>
+<p:notes xmlns:a="http://schemas.openxmlformats.org/drawingml/2006/main" xmlns:r="http://schemas.openxmlformats.org/officeDocument/2006/relationships" xmlns:p="http://schemas.openxmlformats.org/presentationml/2006/main">
+  <p:cSld>
+    <p:spTree>
+      <p:nvGrpSpPr>
+        <p:cNvPr id="1" name=""/>
+        <p:cNvGrpSpPr/>
+        <p:nvPr/>
+      </p:nvGrpSpPr>
+      <p:grpSpPr>
+        <a:xfrm>
+          <a:off x="0" y="0"/>
+          <a:ext cx="0" cy="0"/>
+          <a:chOff x="0" y="0"/>
+          <a:chExt cx="0" cy="0"/>
+        </a:xfrm>
+      </p:grpSpPr>
+      <p:sp>
+        <p:nvSpPr>
+          <p:cNvPr id="2" name="Slide Image Placeholder 1"/>
+          <p:cNvSpPr>
+            <a:spLocks noGrp="1" noRot="1" noChangeAspect="1"/>
+          </p:cNvSpPr>
+          <p:nvPr>
+            <p:ph type="sldImg"/>
+          </p:nvPr>
+        </p:nvSpPr>
+        <p:spPr/>
+      </p:sp>
+      <p:sp>
+        <p:nvSpPr>
+          <p:cNvPr id="3" name="Notes Placeholder 2"/>
+          <p:cNvSpPr>
+            <a:spLocks noGrp="1"/>
+          </p:cNvSpPr>
+          <p:nvPr>
+            <p:ph type="body" idx="1"/>
+          </p:nvPr>
+        </p:nvSpPr>
+        <p:spPr/>
+        <p:txBody>
+          <a:bodyPr/>
+          <a:lstStyle/>
+          <a:p>
+            <a:r>
+              <a:rPr lang="en-US" dirty="0"/>
+              <a:t>This slide is for me, the teacher: it gives the timing of the lesson and what to do if the projector is not available.</a:t>
+            </a:r>
+            <a:endParaRPr lang="en-US" dirty="0"/>
+          </a:p>
+        </p:txBody>
+      </p:sp>
+      <p:sp>
+        <p:nvSpPr>
+          <p:cNvPr id="4" name="Slide Number Placeholder 3"/>
+          <p:cNvSpPr>
+            <a:spLocks noGrp="1"/>
+          </p:cNvSpPr>
+          <p:nvPr>
+            <p:ph type="sldNum" sz="quarter" idx="10"/>
+          </p:nvPr>
+        </p:nvSpPr>
+        <p:spPr/>
+        <p:txBody>
+          <a:bodyPr/>
+          <a:lstStyle/>
+          <a:p>
+            <a:fld id="{F7021451-1387-4CA6-816F-3879F97B5CBC}" type="slidenum">
+              <a:rPr lang="en-US"/>
+              <a:t>54</a:t>
+            </a:fld>
+            <a:endParaRPr lang="en-US"/>
+          </a:p>
+        </p:txBody>
+      </p:sp>
+    </p:spTree>
+    <p:extLst>
+      <p:ext uri="{BB962C8B-B14F-4D97-AF65-F5344CB8AC3E}">
+        <p14:creationId xmlns:p14="http://schemas.microsoft.com/office/powerpoint/2010/main" val="1024086991"/>
+      </p:ext>
+    </p:extLst>
+  </p:cSld>
+  <p:clrMapOvr>
+    <a:masterClrMapping/>
+  </p:clrMapOvr>
+</p:notes>
+</file>
+
+<file path=ppt/notesSlides/notesSlide55.xml><?xml version="1.0" encoding="utf-8"?>
+<p:notes xmlns:a="http://schemas.openxmlformats.org/drawingml/2006/main" xmlns:r="http://schemas.openxmlformats.org/officeDocument/2006/relationships" xmlns:p="http://schemas.openxmlformats.org/presentationml/2006/main">
+  <p:cSld>
+    <p:spTree>
+      <p:nvGrpSpPr>
+        <p:cNvPr id="1" name=""/>
+        <p:cNvGrpSpPr/>
+        <p:nvPr/>
+      </p:nvGrpSpPr>
+      <p:grpSpPr>
+        <a:xfrm>
+          <a:off x="0" y="0"/>
+          <a:ext cx="0" cy="0"/>
+          <a:chOff x="0" y="0"/>
+          <a:chExt cx="0" cy="0"/>
+        </a:xfrm>
+      </p:grpSpPr>
+      <p:sp>
+        <p:nvSpPr>
+          <p:cNvPr id="2" name="Slide Image Placeholder 1"/>
+          <p:cNvSpPr>
+            <a:spLocks noGrp="1" noRot="1" noChangeAspect="1"/>
+          </p:cNvSpPr>
+          <p:nvPr>
+            <p:ph type="sldImg"/>
+          </p:nvPr>
+        </p:nvSpPr>
+        <p:spPr/>
+      </p:sp>
+      <p:sp>
+        <p:nvSpPr>
+          <p:cNvPr id="3" name="Notes Placeholder 2"/>
+          <p:cNvSpPr>
+            <a:spLocks noGrp="1"/>
+          </p:cNvSpPr>
+          <p:nvPr>
+            <p:ph type="body" idx="1"/>
+          </p:nvPr>
+        </p:nvSpPr>
+        <p:spPr/>
+        <p:txBody>
+          <a:bodyPr/>
+          <a:lstStyle/>
+          <a:p>
+            <a:r>
+              <a:rPr lang="en-US" dirty="0"/>
+              <a:t>These are the references and picture credits used to prepare this lesson.</a:t>
+            </a:r>
+            <a:endParaRPr lang="en-US" dirty="0"/>
+          </a:p>
+        </p:txBody>
+      </p:sp>
+      <p:sp>
+        <p:nvSpPr>
+          <p:cNvPr id="4" name="Slide Number Placeholder 3"/>
+          <p:cNvSpPr>
+            <a:spLocks noGrp="1"/>
+          </p:cNvSpPr>
+          <p:nvPr>
+            <p:ph type="sldNum" sz="quarter" idx="10"/>
+          </p:nvPr>
+        </p:nvSpPr>
+        <p:spPr/>
+        <p:txBody>
+          <a:bodyPr/>
+          <a:lstStyle/>
+          <a:p>
+            <a:fld id="{F7021451-1387-4CA6-816F-3879F97B5CBC}" type="slidenum">
+              <a:rPr lang="en-US"/>
+              <a:t>55</a:t>
             </a:fld>
             <a:endParaRPr lang="en-US"/>
           </a:p>
@@ -6510,7 +6688,7 @@
         <p:spPr>
           <a:xfrm>
             <a:off x="0" y="658368"/>
-            <a:ext cx="5120640" cy="5833872"/>
+            <a:ext cx="2468880" cy="5833872"/>
           </a:xfrm>
           <a:prstGeom prst="rect">
             <a:avLst/>
@@ -6525,8 +6703,8 @@
         </p:nvSpPr>
         <p:spPr>
           <a:xfrm>
-            <a:off x="5349240" y="1005840"/>
-            <a:ext cx="6522415" cy="731520"/>
+            <a:off x="2697480" y="1005840"/>
+            <a:ext cx="9174175" cy="731520"/>
           </a:xfrm>
           <a:prstGeom prst="rect">
             <a:avLst/>
@@ -6566,8 +6744,8 @@
         </p:nvSpPr>
         <p:spPr>
           <a:xfrm>
-            <a:off x="5349240" y="1783080"/>
-            <a:ext cx="6522415" cy="4663440"/>
+            <a:off x="2697480" y="1783080"/>
+            <a:ext cx="9174175" cy="4663440"/>
           </a:xfrm>
           <a:prstGeom prst="rect">
             <a:avLst/>
@@ -6594,7 +6772,7 @@
                 <a:ea typeface="Times New Roman" pitchFamily="34" charset="-122"/>
                 <a:cs typeface="Times New Roman" pitchFamily="34" charset="-120"/>
               </a:rPr>
-              <a:t>In the port of Kribi, Amina sees logs, bags of cocoa and tanks of oil waiting to be loaded on ships. Her father tells her that all these products come from the forest region of Cameroon.</a:t>
+              <a:t>In the port of Kribi, Amina sees logs, bags of cocoa and tanks of oil waiting for ships. Her father says that they all come from the forest region of Cameroon. Amina asks: "What riches does the forest region have, and how do people get them?"</a:t>
             </a:r>
             <a:endParaRPr lang="en-US" sz="4000" dirty="0"/>
           </a:p>
@@ -7032,7 +7210,7 @@
                 <a:ea typeface="Times New Roman" pitchFamily="34" charset="-122"/>
                 <a:cs typeface="Times New Roman" pitchFamily="34" charset="-120"/>
               </a:rPr>
-              <a:t>Amina wants to know the resources of the forest region and how they are exploited.</a:t>
+              <a:t>Amina does not know the resources of the forest region and how they are exploited.</a:t>
             </a:r>
             <a:endParaRPr lang="en-US" sz="4000" dirty="0"/>
           </a:p>
@@ -7251,7 +7429,7 @@
                 <a:ea typeface="Times New Roman" pitchFamily="34" charset="-122"/>
                 <a:cs typeface="Times New Roman" pitchFamily="34" charset="-120"/>
               </a:rPr>
-              <a:t>Name three products Amina sees.</a:t>
+              <a:t>Name three products seen in the port.</a:t>
             </a:r>
             <a:endParaRPr lang="en-US" sz="4000" dirty="0"/>
           </a:p>
@@ -7470,7 +7648,7 @@
                 <a:ea typeface="Times New Roman" pitchFamily="34" charset="-122"/>
                 <a:cs typeface="Times New Roman" pitchFamily="34" charset="-120"/>
               </a:rPr>
-              <a:t>Logs (timber), cocoa and oil.</a:t>
+              <a:t>Logs, cocoa and oil.</a:t>
             </a:r>
             <a:endParaRPr lang="en-US" sz="4000" dirty="0"/>
           </a:p>
@@ -7689,7 +7867,7 @@
                 <a:ea typeface="Times New Roman" pitchFamily="34" charset="-122"/>
                 <a:cs typeface="Times New Roman" pitchFamily="34" charset="-120"/>
               </a:rPr>
-              <a:t>Where do these products go?</a:t>
+              <a:t>Where do they come from?</a:t>
             </a:r>
             <a:endParaRPr lang="en-US" sz="4000" dirty="0"/>
           </a:p>
@@ -7908,7 +8086,7 @@
                 <a:ea typeface="Times New Roman" pitchFamily="34" charset="-122"/>
                 <a:cs typeface="Times New Roman" pitchFamily="34" charset="-120"/>
               </a:rPr>
-              <a:t>They are exported to other countries by ship.</a:t>
+              <a:t>From the forest (Equatorial) region of Cameroon.</a:t>
             </a:r>
             <a:endParaRPr lang="en-US" sz="4000" dirty="0"/>
           </a:p>
@@ -8458,7 +8636,7 @@
                 <a:ea typeface="Calibri" pitchFamily="34" charset="-122"/>
                 <a:cs typeface="Calibri" pitchFamily="34" charset="-120"/>
               </a:rPr>
-              <a:t>1. FOREST RESOURCES</a:t>
+              <a:t>1. TYPES OF RESOURCES</a:t>
             </a:r>
             <a:endParaRPr lang="en-US" sz="1400" dirty="0"/>
           </a:p>
@@ -8560,7 +8738,7 @@
                 <a:ea typeface="Times New Roman" pitchFamily="34" charset="-122"/>
                 <a:cs typeface="Times New Roman" pitchFamily="34" charset="-120"/>
               </a:rPr>
-              <a:t>A lorry carries logs in the East Region of Cameroon.</a:t>
+              <a:t>A lorry with logs.</a:t>
             </a:r>
             <a:endParaRPr lang="en-US" sz="1800" dirty="0"/>
           </a:p>
@@ -9267,7 +9445,7 @@
                 <a:ea typeface="Calibri" pitchFamily="34" charset="-122"/>
                 <a:cs typeface="Calibri" pitchFamily="34" charset="-120"/>
               </a:rPr>
-              <a:t>1. FOREST RESOURCES</a:t>
+              <a:t>1. TYPES OF RESOURCES</a:t>
             </a:r>
             <a:endParaRPr lang="en-US" sz="1400" dirty="0"/>
           </a:p>
@@ -9374,7 +9552,7 @@
                 <a:ea typeface="Times New Roman" pitchFamily="34" charset="-122"/>
                 <a:cs typeface="Times New Roman" pitchFamily="34" charset="-120"/>
               </a:rPr>
-              <a:t>Which resource is shown? How is it exploited?</a:t>
+              <a:t>Which resource of the forest is shown here?</a:t>
             </a:r>
             <a:endParaRPr lang="en-US" sz="4000" dirty="0"/>
           </a:p>
@@ -9486,7 +9664,7 @@
                 <a:ea typeface="Calibri" pitchFamily="34" charset="-122"/>
                 <a:cs typeface="Calibri" pitchFamily="34" charset="-120"/>
               </a:rPr>
-              <a:t>1. FOREST RESOURCES</a:t>
+              <a:t>1. TYPES OF RESOURCES</a:t>
             </a:r>
             <a:endParaRPr lang="en-US" sz="1400" dirty="0"/>
           </a:p>
@@ -9593,7 +9771,7 @@
                 <a:ea typeface="Times New Roman" pitchFamily="34" charset="-122"/>
                 <a:cs typeface="Times New Roman" pitchFamily="34" charset="-120"/>
               </a:rPr>
-              <a:t>Timber. Trees are cut with chainsaws and the logs are carried by lorries to sawmills and ports.</a:t>
+              <a:t>Timber (wood).</a:t>
             </a:r>
             <a:endParaRPr lang="en-US" sz="4000" dirty="0"/>
           </a:p>
@@ -9705,7 +9883,7 @@
                 <a:ea typeface="Calibri" pitchFamily="34" charset="-122"/>
                 <a:cs typeface="Calibri" pitchFamily="34" charset="-120"/>
               </a:rPr>
-              <a:t>1. WATER RESOURCES</a:t>
+              <a:t>1. TYPES OF RESOURCES</a:t>
             </a:r>
             <a:endParaRPr lang="en-US" sz="1400" dirty="0"/>
           </a:p>
@@ -9752,7 +9930,7 @@
       </p:sp>
       <p:pic>
         <p:nvPicPr>
-          <p:cNvPr id="4" name="Image 0" descr="/home/claude/f4/img/v2/f2t_lagdo.jpg">    </p:cNvPr>
+          <p:cNvPr id="4" name="Image 0" descr="/home/claude/f4/img/v2/usa_cocoa.jpg">    </p:cNvPr>
           <p:cNvPicPr>
             <a:picLocks noChangeAspect="1"/>
           </p:cNvPicPr>
@@ -9807,7 +9985,7 @@
                 <a:ea typeface="Times New Roman" pitchFamily="34" charset="-122"/>
                 <a:cs typeface="Times New Roman" pitchFamily="34" charset="-120"/>
               </a:rPr>
-              <a:t>A dam and its lake.</a:t>
+              <a:t>A crop of the forest region.</a:t>
             </a:r>
             <a:endParaRPr lang="en-US" sz="1800" dirty="0"/>
           </a:p>
@@ -9919,7 +10097,7 @@
                 <a:ea typeface="Calibri" pitchFamily="34" charset="-122"/>
                 <a:cs typeface="Calibri" pitchFamily="34" charset="-120"/>
               </a:rPr>
-              <a:t>1. WATER RESOURCES</a:t>
+              <a:t>1. TYPES OF RESOURCES</a:t>
             </a:r>
             <a:endParaRPr lang="en-US" sz="1400" dirty="0"/>
           </a:p>
@@ -10026,7 +10204,7 @@
                 <a:ea typeface="Times New Roman" pitchFamily="34" charset="-122"/>
                 <a:cs typeface="Times New Roman" pitchFamily="34" charset="-120"/>
               </a:rPr>
-              <a:t>How are the big rivers of the forest region, like the Sanaga, used?</a:t>
+              <a:t>Which crop is this?</a:t>
             </a:r>
             <a:endParaRPr lang="en-US" sz="4000" dirty="0"/>
           </a:p>
@@ -10138,7 +10316,7 @@
                 <a:ea typeface="Calibri" pitchFamily="34" charset="-122"/>
                 <a:cs typeface="Calibri" pitchFamily="34" charset="-120"/>
               </a:rPr>
-              <a:t>1. WATER RESOURCES</a:t>
+              <a:t>1. TYPES OF RESOURCES</a:t>
             </a:r>
             <a:endParaRPr lang="en-US" sz="1400" dirty="0"/>
           </a:p>
@@ -10245,7 +10423,7 @@
                 <a:ea typeface="Times New Roman" pitchFamily="34" charset="-122"/>
                 <a:cs typeface="Times New Roman" pitchFamily="34" charset="-120"/>
               </a:rPr>
-              <a:t>Dams produce hydro-electricity, as at Edéa and Song Loulou, and people fish in the rivers.</a:t>
+              <a:t>Cocoa.</a:t>
             </a:r>
             <a:endParaRPr lang="en-US" sz="4000" dirty="0"/>
           </a:p>
@@ -10357,7 +10535,7 @@
                 <a:ea typeface="Calibri" pitchFamily="34" charset="-122"/>
                 <a:cs typeface="Calibri" pitchFamily="34" charset="-120"/>
               </a:rPr>
-              <a:t>1. MINERAL RESOURCES</a:t>
+              <a:t>2. METHODS OF EXPLOITATION</a:t>
             </a:r>
             <a:endParaRPr lang="en-US" sz="1400" dirty="0"/>
           </a:p>
@@ -10404,7 +10582,7 @@
       </p:sp>
       <p:pic>
         <p:nvPicPr>
-          <p:cNvPr id="4" name="Image 0" descr="/home/claude/f4/img/v2/f2t_gold_mining.jpg">    </p:cNvPr>
+          <p:cNvPr id="4" name="Image 0" descr="/home/claude/f4/img/v2/f2t_lagdo.jpg">    </p:cNvPr>
           <p:cNvPicPr>
             <a:picLocks noChangeAspect="1"/>
           </p:cNvPicPr>
@@ -10459,7 +10637,7 @@
                 <a:ea typeface="Times New Roman" pitchFamily="34" charset="-122"/>
                 <a:cs typeface="Times New Roman" pitchFamily="34" charset="-120"/>
               </a:rPr>
-              <a:t>Artisanal gold mining.</a:t>
+              <a:t>A dam.</a:t>
             </a:r>
             <a:endParaRPr lang="en-US" sz="1800" dirty="0"/>
           </a:p>
@@ -10571,7 +10749,7 @@
                 <a:ea typeface="Calibri" pitchFamily="34" charset="-122"/>
                 <a:cs typeface="Calibri" pitchFamily="34" charset="-120"/>
               </a:rPr>
-              <a:t>1. MINERAL RESOURCES</a:t>
+              <a:t>2. METHODS OF EXPLOITATION</a:t>
             </a:r>
             <a:endParaRPr lang="en-US" sz="1400" dirty="0"/>
           </a:p>
@@ -10678,7 +10856,7 @@
                 <a:ea typeface="Times New Roman" pitchFamily="34" charset="-122"/>
                 <a:cs typeface="Times New Roman" pitchFamily="34" charset="-120"/>
               </a:rPr>
-              <a:t>Name two minerals of the forest region of Cameroon and how they are exploited.</a:t>
+              <a:t>How is the water of big rivers like the Sanaga used to make electricity?</a:t>
             </a:r>
             <a:endParaRPr lang="en-US" sz="4000" dirty="0"/>
           </a:p>
@@ -10790,7 +10968,7 @@
                 <a:ea typeface="Calibri" pitchFamily="34" charset="-122"/>
                 <a:cs typeface="Calibri" pitchFamily="34" charset="-120"/>
               </a:rPr>
-              <a:t>1. MINERAL RESOURCES</a:t>
+              <a:t>2. METHODS OF EXPLOITATION</a:t>
             </a:r>
             <a:endParaRPr lang="en-US" sz="1400" dirty="0"/>
           </a:p>
@@ -10897,7 +11075,7 @@
                 <a:ea typeface="Times New Roman" pitchFamily="34" charset="-122"/>
                 <a:cs typeface="Times New Roman" pitchFamily="34" charset="-120"/>
               </a:rPr>
-              <a:t>Oil is drilled under the sea near Kribi and Limbe; gold is dug and washed by hand in the East.</a:t>
+              <a:t>Dams are built, as at Edéa and Song Loulou.</a:t>
             </a:r>
             <a:endParaRPr lang="en-US" sz="4000" dirty="0"/>
           </a:p>
@@ -11009,7 +11187,7 @@
                 <a:ea typeface="Calibri" pitchFamily="34" charset="-122"/>
                 <a:cs typeface="Calibri" pitchFamily="34" charset="-120"/>
               </a:rPr>
-              <a:t>1. FARMLAND</a:t>
+              <a:t>2. METHODS OF EXPLOITATION</a:t>
             </a:r>
             <a:endParaRPr lang="en-US" sz="1400" dirty="0"/>
           </a:p>
@@ -11056,7 +11234,7 @@
       </p:sp>
       <p:pic>
         <p:nvPicPr>
-          <p:cNvPr id="4" name="Image 0" descr="/home/claude/f4/img/v2/usa_cocoa.jpg">    </p:cNvPr>
+          <p:cNvPr id="4" name="Image 0" descr="/home/claude/f4/img/v2/f2t_gold_mining.jpg">    </p:cNvPr>
           <p:cNvPicPr>
             <a:picLocks noChangeAspect="1"/>
           </p:cNvPicPr>
@@ -11111,7 +11289,7 @@
                 <a:ea typeface="Times New Roman" pitchFamily="34" charset="-122"/>
                 <a:cs typeface="Times New Roman" pitchFamily="34" charset="-120"/>
               </a:rPr>
-              <a:t>A farmer dries cocoa beans in the sun.</a:t>
+              <a:t>People digging for a mineral.</a:t>
             </a:r>
             <a:endParaRPr lang="en-US" sz="1800" dirty="0"/>
           </a:p>
@@ -11223,7 +11401,7 @@
                 <a:ea typeface="Calibri" pitchFamily="34" charset="-122"/>
                 <a:cs typeface="Calibri" pitchFamily="34" charset="-120"/>
               </a:rPr>
-              <a:t>1. FARMLAND</a:t>
+              <a:t>2. METHODS OF EXPLOITATION</a:t>
             </a:r>
             <a:endParaRPr lang="en-US" sz="1400" dirty="0"/>
           </a:p>
@@ -11330,7 +11508,7 @@
                 <a:ea typeface="Times New Roman" pitchFamily="34" charset="-122"/>
                 <a:cs typeface="Times New Roman" pitchFamily="34" charset="-120"/>
               </a:rPr>
-              <a:t>Which crop is this? Why does it grow well in the forest region?</a:t>
+              <a:t>How is gold exploited in the East of Cameroon?</a:t>
             </a:r>
             <a:endParaRPr lang="en-US" sz="4000" dirty="0"/>
           </a:p>
@@ -12451,7 +12629,7 @@
                 <a:ea typeface="Calibri" pitchFamily="34" charset="-122"/>
                 <a:cs typeface="Calibri" pitchFamily="34" charset="-120"/>
               </a:rPr>
-              <a:t>1. FARMLAND</a:t>
+              <a:t>2. METHODS OF EXPLOITATION</a:t>
             </a:r>
             <a:endParaRPr lang="en-US" sz="1400" dirty="0"/>
           </a:p>
@@ -12558,7 +12736,7 @@
                 <a:ea typeface="Times New Roman" pitchFamily="34" charset="-122"/>
                 <a:cs typeface="Times New Roman" pitchFamily="34" charset="-120"/>
               </a:rPr>
-              <a:t>Cocoa. It needs heat and rain all year, like the equatorial climate.</a:t>
+              <a:t>It is dug and washed by hand.</a:t>
             </a:r>
             <a:endParaRPr lang="en-US" sz="4000" dirty="0"/>
           </a:p>
@@ -12670,7 +12848,7 @@
                 <a:ea typeface="Calibri" pitchFamily="34" charset="-122"/>
                 <a:cs typeface="Calibri" pitchFamily="34" charset="-120"/>
               </a:rPr>
-              <a:t>1. WILDLIFE</a:t>
+              <a:t>2. METHODS OF EXPLOITATION</a:t>
             </a:r>
             <a:endParaRPr lang="en-US" sz="1400" dirty="0"/>
           </a:p>
@@ -12772,7 +12950,7 @@
                 <a:ea typeface="Times New Roman" pitchFamily="34" charset="-122"/>
                 <a:cs typeface="Times New Roman" pitchFamily="34" charset="-120"/>
               </a:rPr>
-              <a:t>Elephants in a national park.</a:t>
+              <a:t>Elephants.</a:t>
             </a:r>
             <a:endParaRPr lang="en-US" sz="1800" dirty="0"/>
           </a:p>
@@ -12884,7 +13062,7 @@
                 <a:ea typeface="Calibri" pitchFamily="34" charset="-122"/>
                 <a:cs typeface="Calibri" pitchFamily="34" charset="-120"/>
               </a:rPr>
-              <a:t>1. WILDLIFE</a:t>
+              <a:t>2. METHODS OF EXPLOITATION</a:t>
             </a:r>
             <a:endParaRPr lang="en-US" sz="1400" dirty="0"/>
           </a:p>
@@ -12991,7 +13169,7 @@
                 <a:ea typeface="Times New Roman" pitchFamily="34" charset="-122"/>
                 <a:cs typeface="Times New Roman" pitchFamily="34" charset="-120"/>
               </a:rPr>
-              <a:t>How is the wildlife of the forest exploited?</a:t>
+              <a:t>How can wild animals bring money without killing them?</a:t>
             </a:r>
             <a:endParaRPr lang="en-US" sz="4000" dirty="0"/>
           </a:p>
@@ -13103,7 +13281,7 @@
                 <a:ea typeface="Calibri" pitchFamily="34" charset="-122"/>
                 <a:cs typeface="Calibri" pitchFamily="34" charset="-120"/>
               </a:rPr>
-              <a:t>1. WILDLIFE</a:t>
+              <a:t>2. METHODS OF EXPLOITATION</a:t>
             </a:r>
             <a:endParaRPr lang="en-US" sz="1400" dirty="0"/>
           </a:p>
@@ -13210,7 +13388,7 @@
                 <a:ea typeface="Times New Roman" pitchFamily="34" charset="-122"/>
                 <a:cs typeface="Times New Roman" pitchFamily="34" charset="-120"/>
               </a:rPr>
-              <a:t>By tourism in national parks like the Dja and Lobéké, and by hunting, which must be controlled.</a:t>
+              <a:t>Through tourism in national parks.</a:t>
             </a:r>
             <a:endParaRPr lang="en-US" sz="4000" dirty="0"/>
           </a:p>
@@ -13421,7 +13599,7 @@
               <a:buNone/>
             </a:pPr>
             <a:r>
-              <a:rPr lang="en-US" sz="4000" b="1" dirty="0">
+              <a:rPr lang="en-US" sz="3200" b="1" dirty="0">
                 <a:solidFill>
                   <a:srgbClr val="111111"/>
                 </a:solidFill>
@@ -13431,7 +13609,7 @@
               </a:rPr>
               <a:t>Topic: Man in His Environment</a:t>
             </a:r>
-            <a:endParaRPr lang="en-US" sz="4000" dirty="0"/>
+            <a:endParaRPr lang="en-US" sz="3200" dirty="0"/>
           </a:p>
           <a:p>
             <a:pPr algn="l" indent="0" marL="0">
@@ -13441,7 +13619,7 @@
               <a:buNone/>
             </a:pPr>
             <a:r>
-              <a:rPr lang="en-US" sz="4000" b="1" dirty="0">
+              <a:rPr lang="en-US" sz="3200" b="1" dirty="0">
                 <a:solidFill>
                   <a:srgbClr val="111111"/>
                 </a:solidFill>
@@ -13451,7 +13629,7 @@
               </a:rPr>
               <a:t>Sub-topic: Natural Regions</a:t>
             </a:r>
-            <a:endParaRPr lang="en-US" sz="4000" dirty="0"/>
+            <a:endParaRPr lang="en-US" sz="3200" dirty="0"/>
           </a:p>
           <a:p>
             <a:pPr algn="l" indent="0" marL="0">
@@ -13461,7 +13639,7 @@
               <a:buNone/>
             </a:pPr>
             <a:r>
-              <a:rPr lang="en-US" sz="4000" b="1" dirty="0">
+              <a:rPr lang="en-US" sz="3200" b="1" dirty="0">
                 <a:solidFill>
                   <a:srgbClr val="990011"/>
                 </a:solidFill>
@@ -13471,7 +13649,7 @@
               </a:rPr>
               <a:t>Lesson 1 (Part 3): The Equatorial Region: Types of Resources and Methods of Exploitation</a:t>
             </a:r>
-            <a:endParaRPr lang="en-US" sz="4000" dirty="0"/>
+            <a:endParaRPr lang="en-US" sz="3200" dirty="0"/>
           </a:p>
         </p:txBody>
       </p:sp>
@@ -13604,7 +13782,7 @@
         <p:spPr>
           <a:xfrm>
             <a:off x="0" y="658368"/>
-            <a:ext cx="5120640" cy="5833872"/>
+            <a:ext cx="3840480" cy="5833872"/>
           </a:xfrm>
           <a:prstGeom prst="rect">
             <a:avLst/>
@@ -13619,8 +13797,8 @@
         </p:nvSpPr>
         <p:spPr>
           <a:xfrm>
-            <a:off x="5349240" y="1005840"/>
-            <a:ext cx="6522415" cy="731520"/>
+            <a:off x="4069080" y="1005840"/>
+            <a:ext cx="7802575" cy="731520"/>
           </a:xfrm>
           <a:prstGeom prst="rect">
             <a:avLst/>
@@ -13660,8 +13838,8 @@
         </p:nvSpPr>
         <p:spPr>
           <a:xfrm>
-            <a:off x="5349240" y="1783080"/>
-            <a:ext cx="6522415" cy="4663440"/>
+            <a:off x="4069080" y="1783080"/>
+            <a:ext cx="7802575" cy="4663440"/>
           </a:xfrm>
           <a:prstGeom prst="rect">
             <a:avLst/>
@@ -13693,11 +13871,12 @@
             <a:endParaRPr lang="en-US" sz="4000" dirty="0"/>
           </a:p>
           <a:p>
-            <a:pPr algn="l" indent="0" marL="0">
+            <a:pPr algn="l" marL="342900" indent="-342900">
               <a:spcAft>
                 <a:spcPts val="800"/>
               </a:spcAft>
-              <a:buNone/>
+              <a:buSzPct val="100000"/>
+              <a:buChar char="•"/>
             </a:pPr>
             <a:r>
               <a:rPr lang="en-US" sz="4000" b="1" dirty="0">
@@ -13710,11 +13889,12 @@
               </a:rPr>
               <a:t>Resource: </a:t>
             </a:r>
-            <a:pPr algn="l" indent="0" marL="0">
+            <a:pPr algn="l" marL="342900" indent="-342900">
               <a:spcAft>
                 <a:spcPts val="800"/>
               </a:spcAft>
-              <a:buNone/>
+              <a:buSzPct val="100000"/>
+              <a:buChar char="•"/>
             </a:pPr>
             <a:r>
               <a:rPr lang="en-US" sz="4000" dirty="0">
@@ -13730,11 +13910,12 @@
             <a:endParaRPr lang="en-US" sz="4000" dirty="0"/>
           </a:p>
           <a:p>
-            <a:pPr algn="l" indent="0" marL="0">
+            <a:pPr algn="l" marL="342900" indent="-342900">
               <a:spcAft>
                 <a:spcPts val="800"/>
               </a:spcAft>
-              <a:buNone/>
+              <a:buSzPct val="100000"/>
+              <a:buChar char="•"/>
             </a:pPr>
             <a:r>
               <a:rPr lang="en-US" sz="4000" b="1" dirty="0">
@@ -13747,11 +13928,12 @@
               </a:rPr>
               <a:t>Exploitation: </a:t>
             </a:r>
-            <a:pPr algn="l" indent="0" marL="0">
+            <a:pPr algn="l" marL="342900" indent="-342900">
               <a:spcAft>
                 <a:spcPts val="800"/>
               </a:spcAft>
-              <a:buNone/>
+              <a:buSzPct val="100000"/>
+              <a:buChar char="•"/>
             </a:pPr>
             <a:r>
               <a:rPr lang="en-US" sz="4000" dirty="0">
@@ -13880,9 +14062,131 @@
           </a:p>
         </p:txBody>
       </p:sp>
+      <p:sp>
+        <p:nvSpPr>
+          <p:cNvPr id="3" name="Text 1"/>
+          <p:cNvSpPr/>
+          <p:nvPr/>
+        </p:nvSpPr>
+        <p:spPr>
+          <a:xfrm>
+            <a:off x="365760" y="1005840"/>
+            <a:ext cx="11460175" cy="731520"/>
+          </a:xfrm>
+          <a:prstGeom prst="rect">
+            <a:avLst/>
+          </a:prstGeom>
+          <a:noFill/>
+          <a:ln/>
+        </p:spPr>
+        <p:txBody>
+          <a:bodyPr wrap="square" lIns="0" tIns="0" rIns="0" bIns="0" rtlCol="0" anchor="ctr">
+            <a:normAutofit/>
+          </a:bodyPr>
+          <a:lstStyle/>
+          <a:p>
+            <a:pPr algn="ctr" indent="0" marL="0">
+              <a:buNone/>
+            </a:pPr>
+            <a:r>
+              <a:rPr lang="en-US" sz="3600" b="1" dirty="0">
+                <a:solidFill>
+                  <a:srgbClr val="990011"/>
+                </a:solidFill>
+                <a:latin typeface="Times New Roman" pitchFamily="34" charset="0"/>
+                <a:ea typeface="Times New Roman" pitchFamily="34" charset="-122"/>
+                <a:cs typeface="Times New Roman" pitchFamily="34" charset="-120"/>
+              </a:rPr>
+              <a:t>1. Types of Resources</a:t>
+            </a:r>
+            <a:endParaRPr lang="en-US" sz="3600" dirty="0"/>
+          </a:p>
+        </p:txBody>
+      </p:sp>
+      <p:sp>
+        <p:nvSpPr>
+          <p:cNvPr id="4" name="Text 2"/>
+          <p:cNvSpPr/>
+          <p:nvPr/>
+        </p:nvSpPr>
+        <p:spPr>
+          <a:xfrm>
+            <a:off x="365760" y="1783080"/>
+            <a:ext cx="4846320" cy="4617720"/>
+          </a:xfrm>
+          <a:prstGeom prst="rect">
+            <a:avLst/>
+          </a:prstGeom>
+          <a:noFill/>
+          <a:ln/>
+        </p:spPr>
+        <p:txBody>
+          <a:bodyPr wrap="square" lIns="0" tIns="0" rIns="0" bIns="0" rtlCol="0" anchor="t"/>
+          <a:lstStyle/>
+          <a:p>
+            <a:pPr algn="l" indent="0" marL="0">
+              <a:spcAft>
+                <a:spcPts val="800"/>
+              </a:spcAft>
+              <a:buNone/>
+            </a:pPr>
+            <a:r>
+              <a:rPr lang="en-US" sz="3600" i="1" dirty="0">
+                <a:solidFill>
+                  <a:srgbClr val="111111"/>
+                </a:solidFill>
+                <a:latin typeface="Times New Roman" pitchFamily="34" charset="0"/>
+                <a:ea typeface="Times New Roman" pitchFamily="34" charset="-122"/>
+                <a:cs typeface="Times New Roman" pitchFamily="34" charset="-120"/>
+              </a:rPr>
+              <a:t>The Equatorial region has the following resources:</a:t>
+            </a:r>
+            <a:endParaRPr lang="en-US" sz="3600" dirty="0"/>
+          </a:p>
+          <a:p>
+            <a:pPr algn="l" marL="342900" indent="-342900">
+              <a:spcAft>
+                <a:spcPts val="800"/>
+              </a:spcAft>
+              <a:buSzPct val="100000"/>
+              <a:buChar char="•"/>
+            </a:pPr>
+            <a:r>
+              <a:rPr lang="en-US" sz="3600" b="1" dirty="0">
+                <a:solidFill>
+                  <a:srgbClr val="111111"/>
+                </a:solidFill>
+                <a:latin typeface="Times New Roman" pitchFamily="34" charset="0"/>
+                <a:ea typeface="Times New Roman" pitchFamily="34" charset="-122"/>
+                <a:cs typeface="Times New Roman" pitchFamily="34" charset="-120"/>
+              </a:rPr>
+              <a:t>Forest: </a:t>
+            </a:r>
+            <a:pPr algn="l" marL="342900" indent="-342900">
+              <a:spcAft>
+                <a:spcPts val="800"/>
+              </a:spcAft>
+              <a:buSzPct val="100000"/>
+              <a:buChar char="•"/>
+            </a:pPr>
+            <a:r>
+              <a:rPr lang="en-US" sz="3600" dirty="0">
+                <a:solidFill>
+                  <a:srgbClr val="111111"/>
+                </a:solidFill>
+                <a:latin typeface="Times New Roman" pitchFamily="34" charset="0"/>
+                <a:ea typeface="Times New Roman" pitchFamily="34" charset="-122"/>
+                <a:cs typeface="Times New Roman" pitchFamily="34" charset="-120"/>
+              </a:rPr>
+              <a:t>Timber, firewood, fruits and medicines.</a:t>
+            </a:r>
+            <a:endParaRPr lang="en-US" sz="3600" dirty="0"/>
+          </a:p>
+        </p:txBody>
+      </p:sp>
       <p:pic>
         <p:nvPicPr>
-          <p:cNvPr id="3" name="Image 0" descr="/home/claude/f4/img/minesec_sheet.png">    </p:cNvPr>
+          <p:cNvPr id="5" name="Image 0" descr="/home/claude/f4/img/v2/f2t_logging_truck.jpg">    </p:cNvPr>
           <p:cNvPicPr>
             <a:picLocks noChangeAspect="1"/>
           </p:cNvPicPr>
@@ -13896,8 +14200,8 @@
         </p:blipFill>
         <p:spPr>
           <a:xfrm>
-            <a:off x="0" y="658368"/>
-            <a:ext cx="3840480" cy="5833872"/>
+            <a:off x="5349240" y="2071212"/>
+            <a:ext cx="6659575" cy="3693983"/>
           </a:xfrm>
           <a:prstGeom prst="rect">
             <a:avLst/>
@@ -13906,14 +14210,14 @@
       </p:pic>
       <p:sp>
         <p:nvSpPr>
-          <p:cNvPr id="4" name="Text 1"/>
+          <p:cNvPr id="6" name="Text 3"/>
           <p:cNvSpPr/>
           <p:nvPr/>
         </p:nvSpPr>
         <p:spPr>
           <a:xfrm>
-            <a:off x="4069080" y="1005840"/>
-            <a:ext cx="7802575" cy="731520"/>
+            <a:off x="5349240" y="6089904"/>
+            <a:ext cx="6659575" cy="347472"/>
           </a:xfrm>
           <a:prstGeom prst="rect">
             <a:avLst/>
@@ -13922,142 +14226,24 @@
           <a:ln/>
         </p:spPr>
         <p:txBody>
-          <a:bodyPr wrap="square" lIns="0" tIns="0" rIns="0" bIns="0" rtlCol="0" anchor="ctr">
-            <a:normAutofit/>
-          </a:bodyPr>
+          <a:bodyPr wrap="square" lIns="0" tIns="0" rIns="0" bIns="0" rtlCol="0" anchor="ctr"/>
           <a:lstStyle/>
           <a:p>
             <a:pPr algn="ctr" indent="0" marL="0">
               <a:buNone/>
             </a:pPr>
             <a:r>
-              <a:rPr lang="en-US" sz="3600" b="1" dirty="0">
-                <a:solidFill>
-                  <a:srgbClr val="990011"/>
+              <a:rPr lang="en-US" sz="1600" i="1" dirty="0">
+                <a:solidFill>
+                  <a:srgbClr val="555555"/>
                 </a:solidFill>
                 <a:latin typeface="Times New Roman" pitchFamily="34" charset="0"/>
                 <a:ea typeface="Times New Roman" pitchFamily="34" charset="-122"/>
                 <a:cs typeface="Times New Roman" pitchFamily="34" charset="-120"/>
               </a:rPr>
-              <a:t>1. Types of Resources</a:t>
-            </a:r>
-            <a:endParaRPr lang="en-US" sz="3600" dirty="0"/>
-          </a:p>
-        </p:txBody>
-      </p:sp>
-      <p:sp>
-        <p:nvSpPr>
-          <p:cNvPr id="5" name="Text 2"/>
-          <p:cNvSpPr/>
-          <p:nvPr/>
-        </p:nvSpPr>
-        <p:spPr>
-          <a:xfrm>
-            <a:off x="4069080" y="1783080"/>
-            <a:ext cx="7802575" cy="4663440"/>
-          </a:xfrm>
-          <a:prstGeom prst="rect">
-            <a:avLst/>
-          </a:prstGeom>
-          <a:noFill/>
-          <a:ln/>
-        </p:spPr>
-        <p:txBody>
-          <a:bodyPr wrap="square" lIns="0" tIns="0" rIns="0" bIns="0" rtlCol="0" anchor="t"/>
-          <a:lstStyle/>
-          <a:p>
-            <a:pPr algn="l" indent="0" marL="0">
-              <a:spcAft>
-                <a:spcPts val="800"/>
-              </a:spcAft>
-              <a:buNone/>
-            </a:pPr>
-            <a:r>
-              <a:rPr lang="en-US" sz="4000" i="1" dirty="0">
-                <a:solidFill>
-                  <a:srgbClr val="111111"/>
-                </a:solidFill>
-                <a:latin typeface="Times New Roman" pitchFamily="34" charset="0"/>
-                <a:ea typeface="Times New Roman" pitchFamily="34" charset="-122"/>
-                <a:cs typeface="Times New Roman" pitchFamily="34" charset="-120"/>
-              </a:rPr>
-              <a:t>The Equatorial region has the following resources:</a:t>
-            </a:r>
-            <a:endParaRPr lang="en-US" sz="4000" dirty="0"/>
-          </a:p>
-          <a:p>
-            <a:pPr algn="l" indent="0" marL="0">
-              <a:spcAft>
-                <a:spcPts val="800"/>
-              </a:spcAft>
-              <a:buNone/>
-            </a:pPr>
-            <a:r>
-              <a:rPr lang="en-US" sz="4000" b="1" dirty="0">
-                <a:solidFill>
-                  <a:srgbClr val="111111"/>
-                </a:solidFill>
-                <a:latin typeface="Times New Roman" pitchFamily="34" charset="0"/>
-                <a:ea typeface="Times New Roman" pitchFamily="34" charset="-122"/>
-                <a:cs typeface="Times New Roman" pitchFamily="34" charset="-120"/>
-              </a:rPr>
-              <a:t>Forest: </a:t>
-            </a:r>
-            <a:pPr algn="l" indent="0" marL="0">
-              <a:spcAft>
-                <a:spcPts val="800"/>
-              </a:spcAft>
-              <a:buNone/>
-            </a:pPr>
-            <a:r>
-              <a:rPr lang="en-US" sz="4000" dirty="0">
-                <a:solidFill>
-                  <a:srgbClr val="111111"/>
-                </a:solidFill>
-                <a:latin typeface="Times New Roman" pitchFamily="34" charset="0"/>
-                <a:ea typeface="Times New Roman" pitchFamily="34" charset="-122"/>
-                <a:cs typeface="Times New Roman" pitchFamily="34" charset="-120"/>
-              </a:rPr>
-              <a:t>The forest gives timber, firewood, fruits and medicines.</a:t>
-            </a:r>
-            <a:endParaRPr lang="en-US" sz="4000" dirty="0"/>
-          </a:p>
-          <a:p>
-            <a:pPr algn="l" indent="0" marL="0">
-              <a:spcAft>
-                <a:spcPts val="800"/>
-              </a:spcAft>
-              <a:buNone/>
-            </a:pPr>
-            <a:r>
-              <a:rPr lang="en-US" sz="4000" b="1" dirty="0">
-                <a:solidFill>
-                  <a:srgbClr val="111111"/>
-                </a:solidFill>
-                <a:latin typeface="Times New Roman" pitchFamily="34" charset="0"/>
-                <a:ea typeface="Times New Roman" pitchFamily="34" charset="-122"/>
-                <a:cs typeface="Times New Roman" pitchFamily="34" charset="-120"/>
-              </a:rPr>
-              <a:t>Water: </a:t>
-            </a:r>
-            <a:pPr algn="l" indent="0" marL="0">
-              <a:spcAft>
-                <a:spcPts val="800"/>
-              </a:spcAft>
-              <a:buNone/>
-            </a:pPr>
-            <a:r>
-              <a:rPr lang="en-US" sz="4000" dirty="0">
-                <a:solidFill>
-                  <a:srgbClr val="111111"/>
-                </a:solidFill>
-                <a:latin typeface="Times New Roman" pitchFamily="34" charset="0"/>
-                <a:ea typeface="Times New Roman" pitchFamily="34" charset="-122"/>
-                <a:cs typeface="Times New Roman" pitchFamily="34" charset="-120"/>
-              </a:rPr>
-              <a:t>Large rivers such as the Sanaga and the Congo give water, fish and energy.</a:t>
-            </a:r>
-            <a:endParaRPr lang="en-US" sz="4000" dirty="0"/>
+              <a:t>Illustration: timber</a:t>
+            </a:r>
+            <a:endParaRPr lang="en-US" sz="1600" dirty="0"/>
           </a:p>
         </p:txBody>
       </p:sp>
@@ -14190,7 +14376,7 @@
         <p:spPr>
           <a:xfrm>
             <a:off x="0" y="658368"/>
-            <a:ext cx="2468880" cy="5833872"/>
+            <a:ext cx="5120640" cy="5833872"/>
           </a:xfrm>
           <a:prstGeom prst="rect">
             <a:avLst/>
@@ -14205,8 +14391,8 @@
         </p:nvSpPr>
         <p:spPr>
           <a:xfrm>
-            <a:off x="2697480" y="1005840"/>
-            <a:ext cx="9174175" cy="731520"/>
+            <a:off x="5349240" y="1005840"/>
+            <a:ext cx="6522415" cy="731520"/>
           </a:xfrm>
           <a:prstGeom prst="rect">
             <a:avLst/>
@@ -14232,7 +14418,7 @@
                 <a:ea typeface="Times New Roman" pitchFamily="34" charset="-122"/>
                 <a:cs typeface="Times New Roman" pitchFamily="34" charset="-120"/>
               </a:rPr>
-              <a:t>1. Types of Resources (continued)</a:t>
+              <a:t>1. Types of Resources</a:t>
             </a:r>
             <a:endParaRPr lang="en-US" sz="3600" dirty="0"/>
           </a:p>
@@ -14246,8 +14432,8 @@
         </p:nvSpPr>
         <p:spPr>
           <a:xfrm>
-            <a:off x="2697480" y="1783080"/>
-            <a:ext cx="9174175" cy="4663440"/>
+            <a:off x="5349240" y="1783080"/>
+            <a:ext cx="6522415" cy="4663440"/>
           </a:xfrm>
           <a:prstGeom prst="rect">
             <a:avLst/>
@@ -14259,11 +14445,51 @@
           <a:bodyPr wrap="square" lIns="0" tIns="0" rIns="0" bIns="0" rtlCol="0" anchor="t"/>
           <a:lstStyle/>
           <a:p>
-            <a:pPr algn="l" indent="0" marL="0">
+            <a:pPr algn="l" marL="342900" indent="-342900">
               <a:spcAft>
                 <a:spcPts val="800"/>
               </a:spcAft>
-              <a:buNone/>
+              <a:buSzPct val="100000"/>
+              <a:buChar char="•"/>
+            </a:pPr>
+            <a:r>
+              <a:rPr lang="en-US" sz="4000" b="1" dirty="0">
+                <a:solidFill>
+                  <a:srgbClr val="111111"/>
+                </a:solidFill>
+                <a:latin typeface="Times New Roman" pitchFamily="34" charset="0"/>
+                <a:ea typeface="Times New Roman" pitchFamily="34" charset="-122"/>
+                <a:cs typeface="Times New Roman" pitchFamily="34" charset="-120"/>
+              </a:rPr>
+              <a:t>Water: </a:t>
+            </a:r>
+            <a:pPr algn="l" marL="342900" indent="-342900">
+              <a:spcAft>
+                <a:spcPts val="800"/>
+              </a:spcAft>
+              <a:buSzPct val="100000"/>
+              <a:buChar char="•"/>
+            </a:pPr>
+            <a:r>
+              <a:rPr lang="en-US" sz="4000" dirty="0">
+                <a:solidFill>
+                  <a:srgbClr val="111111"/>
+                </a:solidFill>
+                <a:latin typeface="Times New Roman" pitchFamily="34" charset="0"/>
+                <a:ea typeface="Times New Roman" pitchFamily="34" charset="-122"/>
+                <a:cs typeface="Times New Roman" pitchFamily="34" charset="-120"/>
+              </a:rPr>
+              <a:t>Big rivers such as the Sanaga and the Congo.</a:t>
+            </a:r>
+            <a:endParaRPr lang="en-US" sz="4000" dirty="0"/>
+          </a:p>
+          <a:p>
+            <a:pPr algn="l" marL="342900" indent="-342900">
+              <a:spcAft>
+                <a:spcPts val="800"/>
+              </a:spcAft>
+              <a:buSzPct val="100000"/>
+              <a:buChar char="•"/>
             </a:pPr>
             <a:r>
               <a:rPr lang="en-US" sz="4000" b="1" dirty="0">
@@ -14276,11 +14502,12 @@
               </a:rPr>
               <a:t>Minerals: </a:t>
             </a:r>
-            <a:pPr algn="l" indent="0" marL="0">
+            <a:pPr algn="l" marL="342900" indent="-342900">
               <a:spcAft>
                 <a:spcPts val="800"/>
               </a:spcAft>
-              <a:buNone/>
+              <a:buSzPct val="100000"/>
+              <a:buChar char="•"/>
             </a:pPr>
             <a:r>
               <a:rPr lang="en-US" sz="4000" dirty="0">
@@ -14291,81 +14518,7 @@
                 <a:ea typeface="Times New Roman" pitchFamily="34" charset="-122"/>
                 <a:cs typeface="Times New Roman" pitchFamily="34" charset="-120"/>
               </a:rPr>
-              <a:t>The region has oil, gas, gold, iron ore and bauxite.</a:t>
-            </a:r>
-            <a:endParaRPr lang="en-US" sz="4000" dirty="0"/>
-          </a:p>
-          <a:p>
-            <a:pPr algn="l" indent="0" marL="0">
-              <a:spcAft>
-                <a:spcPts val="800"/>
-              </a:spcAft>
-              <a:buNone/>
-            </a:pPr>
-            <a:r>
-              <a:rPr lang="en-US" sz="4000" b="1" dirty="0">
-                <a:solidFill>
-                  <a:srgbClr val="111111"/>
-                </a:solidFill>
-                <a:latin typeface="Times New Roman" pitchFamily="34" charset="0"/>
-                <a:ea typeface="Times New Roman" pitchFamily="34" charset="-122"/>
-                <a:cs typeface="Times New Roman" pitchFamily="34" charset="-120"/>
-              </a:rPr>
-              <a:t>Farmland: </a:t>
-            </a:r>
-            <a:pPr algn="l" indent="0" marL="0">
-              <a:spcAft>
-                <a:spcPts val="800"/>
-              </a:spcAft>
-              <a:buNone/>
-            </a:pPr>
-            <a:r>
-              <a:rPr lang="en-US" sz="4000" dirty="0">
-                <a:solidFill>
-                  <a:srgbClr val="111111"/>
-                </a:solidFill>
-                <a:latin typeface="Times New Roman" pitchFamily="34" charset="0"/>
-                <a:ea typeface="Times New Roman" pitchFamily="34" charset="-122"/>
-                <a:cs typeface="Times New Roman" pitchFamily="34" charset="-120"/>
-              </a:rPr>
-              <a:t>The hot and wet climate is good for cocoa, coffee, oil palm, rubber and food crops.</a:t>
-            </a:r>
-            <a:endParaRPr lang="en-US" sz="4000" dirty="0"/>
-          </a:p>
-          <a:p>
-            <a:pPr algn="l" indent="0" marL="0">
-              <a:spcAft>
-                <a:spcPts val="800"/>
-              </a:spcAft>
-              <a:buNone/>
-            </a:pPr>
-            <a:r>
-              <a:rPr lang="en-US" sz="4000" b="1" dirty="0">
-                <a:solidFill>
-                  <a:srgbClr val="111111"/>
-                </a:solidFill>
-                <a:latin typeface="Times New Roman" pitchFamily="34" charset="0"/>
-                <a:ea typeface="Times New Roman" pitchFamily="34" charset="-122"/>
-                <a:cs typeface="Times New Roman" pitchFamily="34" charset="-120"/>
-              </a:rPr>
-              <a:t>Wildlife: </a:t>
-            </a:r>
-            <a:pPr algn="l" indent="0" marL="0">
-              <a:spcAft>
-                <a:spcPts val="800"/>
-              </a:spcAft>
-              <a:buNone/>
-            </a:pPr>
-            <a:r>
-              <a:rPr lang="en-US" sz="4000" dirty="0">
-                <a:solidFill>
-                  <a:srgbClr val="111111"/>
-                </a:solidFill>
-                <a:latin typeface="Times New Roman" pitchFamily="34" charset="0"/>
-                <a:ea typeface="Times New Roman" pitchFamily="34" charset="-122"/>
-                <a:cs typeface="Times New Roman" pitchFamily="34" charset="-120"/>
-              </a:rPr>
-              <a:t>The forest has many animals such as gorillas, elephants and birds.</a:t>
+              <a:t>Oil, gas, gold, iron ore and bauxite.</a:t>
             </a:r>
             <a:endParaRPr lang="en-US" sz="4000" dirty="0"/>
           </a:p>
@@ -14483,9 +14636,111 @@
           </a:p>
         </p:txBody>
       </p:sp>
+      <p:sp>
+        <p:nvSpPr>
+          <p:cNvPr id="3" name="Text 1"/>
+          <p:cNvSpPr/>
+          <p:nvPr/>
+        </p:nvSpPr>
+        <p:spPr>
+          <a:xfrm>
+            <a:off x="365760" y="1005840"/>
+            <a:ext cx="11460175" cy="731520"/>
+          </a:xfrm>
+          <a:prstGeom prst="rect">
+            <a:avLst/>
+          </a:prstGeom>
+          <a:noFill/>
+          <a:ln/>
+        </p:spPr>
+        <p:txBody>
+          <a:bodyPr wrap="square" lIns="0" tIns="0" rIns="0" bIns="0" rtlCol="0" anchor="ctr">
+            <a:normAutofit/>
+          </a:bodyPr>
+          <a:lstStyle/>
+          <a:p>
+            <a:pPr algn="ctr" indent="0" marL="0">
+              <a:buNone/>
+            </a:pPr>
+            <a:r>
+              <a:rPr lang="en-US" sz="3600" b="1" dirty="0">
+                <a:solidFill>
+                  <a:srgbClr val="990011"/>
+                </a:solidFill>
+                <a:latin typeface="Times New Roman" pitchFamily="34" charset="0"/>
+                <a:ea typeface="Times New Roman" pitchFamily="34" charset="-122"/>
+                <a:cs typeface="Times New Roman" pitchFamily="34" charset="-120"/>
+              </a:rPr>
+              <a:t>1. Types of Resources</a:t>
+            </a:r>
+            <a:endParaRPr lang="en-US" sz="3600" dirty="0"/>
+          </a:p>
+        </p:txBody>
+      </p:sp>
+      <p:sp>
+        <p:nvSpPr>
+          <p:cNvPr id="4" name="Text 2"/>
+          <p:cNvSpPr/>
+          <p:nvPr/>
+        </p:nvSpPr>
+        <p:spPr>
+          <a:xfrm>
+            <a:off x="365760" y="1783080"/>
+            <a:ext cx="4846320" cy="4617720"/>
+          </a:xfrm>
+          <a:prstGeom prst="rect">
+            <a:avLst/>
+          </a:prstGeom>
+          <a:noFill/>
+          <a:ln/>
+        </p:spPr>
+        <p:txBody>
+          <a:bodyPr wrap="square" lIns="0" tIns="0" rIns="0" bIns="0" rtlCol="0" anchor="t"/>
+          <a:lstStyle/>
+          <a:p>
+            <a:pPr algn="l" marL="342900" indent="-342900">
+              <a:spcAft>
+                <a:spcPts val="800"/>
+              </a:spcAft>
+              <a:buSzPct val="100000"/>
+              <a:buChar char="•"/>
+            </a:pPr>
+            <a:r>
+              <a:rPr lang="en-US" sz="3600" b="1" dirty="0">
+                <a:solidFill>
+                  <a:srgbClr val="111111"/>
+                </a:solidFill>
+                <a:latin typeface="Times New Roman" pitchFamily="34" charset="0"/>
+                <a:ea typeface="Times New Roman" pitchFamily="34" charset="-122"/>
+                <a:cs typeface="Times New Roman" pitchFamily="34" charset="-120"/>
+              </a:rPr>
+              <a:t>Fertile land: </a:t>
+            </a:r>
+            <a:pPr algn="l" marL="342900" indent="-342900">
+              <a:spcAft>
+                <a:spcPts val="800"/>
+              </a:spcAft>
+              <a:buSzPct val="100000"/>
+              <a:buChar char="•"/>
+            </a:pPr>
+            <a:r>
+              <a:rPr lang="en-US" sz="3600" dirty="0">
+                <a:solidFill>
+                  <a:srgbClr val="111111"/>
+                </a:solidFill>
+                <a:latin typeface="Times New Roman" pitchFamily="34" charset="0"/>
+                <a:ea typeface="Times New Roman" pitchFamily="34" charset="-122"/>
+                <a:cs typeface="Times New Roman" pitchFamily="34" charset="-120"/>
+              </a:rPr>
+              <a:t>Good for cocoa, coffee, oil palm and rubber.</a:t>
+            </a:r>
+            <a:endParaRPr lang="en-US" sz="3600" dirty="0"/>
+          </a:p>
+        </p:txBody>
+      </p:sp>
       <p:pic>
         <p:nvPicPr>
-          <p:cNvPr id="3" name="Image 0" descr="/home/claude/f4/img/minesec_sheet.png">    </p:cNvPr>
+          <p:cNvPr id="5" name="Image 0" descr="/home/claude/f4/img/v2/usa_cocoa.jpg">    </p:cNvPr>
           <p:cNvPicPr>
             <a:picLocks noChangeAspect="1"/>
           </p:cNvPicPr>
@@ -14499,8 +14754,8 @@
         </p:blipFill>
         <p:spPr>
           <a:xfrm>
-            <a:off x="0" y="658368"/>
-            <a:ext cx="5120640" cy="5833872"/>
+            <a:off x="5349240" y="2071212"/>
+            <a:ext cx="6659575" cy="3693983"/>
           </a:xfrm>
           <a:prstGeom prst="rect">
             <a:avLst/>
@@ -14509,14 +14764,14 @@
       </p:pic>
       <p:sp>
         <p:nvSpPr>
-          <p:cNvPr id="4" name="Text 1"/>
+          <p:cNvPr id="6" name="Text 3"/>
           <p:cNvSpPr/>
           <p:nvPr/>
         </p:nvSpPr>
         <p:spPr>
           <a:xfrm>
-            <a:off x="5349240" y="1005840"/>
-            <a:ext cx="6522415" cy="731520"/>
+            <a:off x="5349240" y="6089904"/>
+            <a:ext cx="6659575" cy="347472"/>
           </a:xfrm>
           <a:prstGeom prst="rect">
             <a:avLst/>
@@ -14525,105 +14780,24 @@
           <a:ln/>
         </p:spPr>
         <p:txBody>
-          <a:bodyPr wrap="square" lIns="0" tIns="0" rIns="0" bIns="0" rtlCol="0" anchor="ctr">
-            <a:normAutofit/>
-          </a:bodyPr>
+          <a:bodyPr wrap="square" lIns="0" tIns="0" rIns="0" bIns="0" rtlCol="0" anchor="ctr"/>
           <a:lstStyle/>
           <a:p>
             <a:pPr algn="ctr" indent="0" marL="0">
               <a:buNone/>
             </a:pPr>
             <a:r>
-              <a:rPr lang="en-US" sz="3600" b="1" dirty="0">
-                <a:solidFill>
-                  <a:srgbClr val="990011"/>
+              <a:rPr lang="en-US" sz="1600" i="1" dirty="0">
+                <a:solidFill>
+                  <a:srgbClr val="555555"/>
                 </a:solidFill>
                 <a:latin typeface="Times New Roman" pitchFamily="34" charset="0"/>
                 <a:ea typeface="Times New Roman" pitchFamily="34" charset="-122"/>
                 <a:cs typeface="Times New Roman" pitchFamily="34" charset="-120"/>
               </a:rPr>
-              <a:t>2. Methods of Exploitation</a:t>
-            </a:r>
-            <a:endParaRPr lang="en-US" sz="3600" dirty="0"/>
-          </a:p>
-        </p:txBody>
-      </p:sp>
-      <p:sp>
-        <p:nvSpPr>
-          <p:cNvPr id="5" name="Text 2"/>
-          <p:cNvSpPr/>
-          <p:nvPr/>
-        </p:nvSpPr>
-        <p:spPr>
-          <a:xfrm>
-            <a:off x="5349240" y="1783080"/>
-            <a:ext cx="6522415" cy="4663440"/>
-          </a:xfrm>
-          <a:prstGeom prst="rect">
-            <a:avLst/>
-          </a:prstGeom>
-          <a:noFill/>
-          <a:ln/>
-        </p:spPr>
-        <p:txBody>
-          <a:bodyPr wrap="square" lIns="0" tIns="0" rIns="0" bIns="0" rtlCol="0" anchor="t"/>
-          <a:lstStyle/>
-          <a:p>
-            <a:pPr algn="l" indent="0" marL="0">
-              <a:spcAft>
-                <a:spcPts val="800"/>
-              </a:spcAft>
-              <a:buNone/>
-            </a:pPr>
-            <a:r>
-              <a:rPr lang="en-US" sz="4000" i="1" dirty="0">
-                <a:solidFill>
-                  <a:srgbClr val="111111"/>
-                </a:solidFill>
-                <a:latin typeface="Times New Roman" pitchFamily="34" charset="0"/>
-                <a:ea typeface="Times New Roman" pitchFamily="34" charset="-122"/>
-                <a:cs typeface="Times New Roman" pitchFamily="34" charset="-120"/>
-              </a:rPr>
-              <a:t>These resources are exploited in the following ways:</a:t>
-            </a:r>
-            <a:endParaRPr lang="en-US" sz="4000" dirty="0"/>
-          </a:p>
-          <a:p>
-            <a:pPr algn="l" indent="0" marL="0">
-              <a:spcAft>
-                <a:spcPts val="800"/>
-              </a:spcAft>
-              <a:buNone/>
-            </a:pPr>
-            <a:r>
-              <a:rPr lang="en-US" sz="4000" b="1" dirty="0">
-                <a:solidFill>
-                  <a:srgbClr val="111111"/>
-                </a:solidFill>
-                <a:latin typeface="Times New Roman" pitchFamily="34" charset="0"/>
-                <a:ea typeface="Times New Roman" pitchFamily="34" charset="-122"/>
-                <a:cs typeface="Times New Roman" pitchFamily="34" charset="-120"/>
-              </a:rPr>
-              <a:t>Timber: </a:t>
-            </a:r>
-            <a:pPr algn="l" indent="0" marL="0">
-              <a:spcAft>
-                <a:spcPts val="800"/>
-              </a:spcAft>
-              <a:buNone/>
-            </a:pPr>
-            <a:r>
-              <a:rPr lang="en-US" sz="4000" dirty="0">
-                <a:solidFill>
-                  <a:srgbClr val="111111"/>
-                </a:solidFill>
-                <a:latin typeface="Times New Roman" pitchFamily="34" charset="0"/>
-                <a:ea typeface="Times New Roman" pitchFamily="34" charset="-122"/>
-                <a:cs typeface="Times New Roman" pitchFamily="34" charset="-120"/>
-              </a:rPr>
-              <a:t>Trees are cut with chainsaws, carried by lorries and sawn in sawmills or exported.</a:t>
-            </a:r>
-            <a:endParaRPr lang="en-US" sz="4000" dirty="0"/>
+              <a:t>Illustration: cocoa</a:t>
+            </a:r>
+            <a:endParaRPr lang="en-US" sz="1600" dirty="0"/>
           </a:p>
         </p:txBody>
       </p:sp>
@@ -14756,7 +14930,7 @@
         <p:spPr>
           <a:xfrm>
             <a:off x="0" y="658368"/>
-            <a:ext cx="3840480" cy="5833872"/>
+            <a:ext cx="5120640" cy="5833872"/>
           </a:xfrm>
           <a:prstGeom prst="rect">
             <a:avLst/>
@@ -14771,8 +14945,8 @@
         </p:nvSpPr>
         <p:spPr>
           <a:xfrm>
-            <a:off x="4069080" y="1005840"/>
-            <a:ext cx="7802575" cy="731520"/>
+            <a:off x="5349240" y="1005840"/>
+            <a:ext cx="6522415" cy="731520"/>
           </a:xfrm>
           <a:prstGeom prst="rect">
             <a:avLst/>
@@ -14798,7 +14972,7 @@
                 <a:ea typeface="Times New Roman" pitchFamily="34" charset="-122"/>
                 <a:cs typeface="Times New Roman" pitchFamily="34" charset="-120"/>
               </a:rPr>
-              <a:t>2. Methods of Exploitation (continued)</a:t>
+              <a:t>1. Types of Resources</a:t>
             </a:r>
             <a:endParaRPr lang="en-US" sz="3600" dirty="0"/>
           </a:p>
@@ -14812,8 +14986,8 @@
         </p:nvSpPr>
         <p:spPr>
           <a:xfrm>
-            <a:off x="4069080" y="1783080"/>
-            <a:ext cx="7802575" cy="4663440"/>
+            <a:off x="5349240" y="1783080"/>
+            <a:ext cx="6522415" cy="4663440"/>
           </a:xfrm>
           <a:prstGeom prst="rect">
             <a:avLst/>
@@ -14825,11 +14999,12 @@
           <a:bodyPr wrap="square" lIns="0" tIns="0" rIns="0" bIns="0" rtlCol="0" anchor="t"/>
           <a:lstStyle/>
           <a:p>
-            <a:pPr algn="l" indent="0" marL="0">
+            <a:pPr algn="l" marL="342900" indent="-342900">
               <a:spcAft>
                 <a:spcPts val="800"/>
               </a:spcAft>
-              <a:buNone/>
+              <a:buSzPct val="100000"/>
+              <a:buChar char="•"/>
             </a:pPr>
             <a:r>
               <a:rPr lang="en-US" sz="4000" b="1" dirty="0">
@@ -14840,13 +15015,14 @@
                 <a:ea typeface="Times New Roman" pitchFamily="34" charset="-122"/>
                 <a:cs typeface="Times New Roman" pitchFamily="34" charset="-120"/>
               </a:rPr>
-              <a:t>Water: </a:t>
-            </a:r>
-            <a:pPr algn="l" indent="0" marL="0">
+              <a:t>Wildlife: </a:t>
+            </a:r>
+            <a:pPr algn="l" marL="342900" indent="-342900">
               <a:spcAft>
                 <a:spcPts val="800"/>
               </a:spcAft>
-              <a:buNone/>
+              <a:buSzPct val="100000"/>
+              <a:buChar char="•"/>
             </a:pPr>
             <a:r>
               <a:rPr lang="en-US" sz="4000" dirty="0">
@@ -14857,44 +15033,7 @@
                 <a:ea typeface="Times New Roman" pitchFamily="34" charset="-122"/>
                 <a:cs typeface="Times New Roman" pitchFamily="34" charset="-120"/>
               </a:rPr>
-              <a:t>Dams at Edéa and Song Loulou produce electricity, and people fish with canoes and nets.</a:t>
-            </a:r>
-            <a:endParaRPr lang="en-US" sz="4000" dirty="0"/>
-          </a:p>
-          <a:p>
-            <a:pPr algn="l" indent="0" marL="0">
-              <a:spcAft>
-                <a:spcPts val="800"/>
-              </a:spcAft>
-              <a:buNone/>
-            </a:pPr>
-            <a:r>
-              <a:rPr lang="en-US" sz="4000" b="1" dirty="0">
-                <a:solidFill>
-                  <a:srgbClr val="111111"/>
-                </a:solidFill>
-                <a:latin typeface="Times New Roman" pitchFamily="34" charset="0"/>
-                <a:ea typeface="Times New Roman" pitchFamily="34" charset="-122"/>
-                <a:cs typeface="Times New Roman" pitchFamily="34" charset="-120"/>
-              </a:rPr>
-              <a:t>Minerals: </a:t>
-            </a:r>
-            <a:pPr algn="l" indent="0" marL="0">
-              <a:spcAft>
-                <a:spcPts val="800"/>
-              </a:spcAft>
-              <a:buNone/>
-            </a:pPr>
-            <a:r>
-              <a:rPr lang="en-US" sz="4000" dirty="0">
-                <a:solidFill>
-                  <a:srgbClr val="111111"/>
-                </a:solidFill>
-                <a:latin typeface="Times New Roman" pitchFamily="34" charset="0"/>
-                <a:ea typeface="Times New Roman" pitchFamily="34" charset="-122"/>
-                <a:cs typeface="Times New Roman" pitchFamily="34" charset="-120"/>
-              </a:rPr>
-              <a:t>Oil is drilled under the sea near Kribi and Limbe, and gold is dug by hand in the East.</a:t>
+              <a:t>Gorillas, elephants and many birds.</a:t>
             </a:r>
             <a:endParaRPr lang="en-US" sz="4000" dirty="0"/>
           </a:p>
@@ -15310,7 +15449,7 @@
                 <a:ea typeface="Times New Roman" pitchFamily="34" charset="-122"/>
                 <a:cs typeface="Times New Roman" pitchFamily="34" charset="-120"/>
               </a:rPr>
-              <a:t>2. Methods of Exploitation (continued)</a:t>
+              <a:t>2. Methods of Exploitation</a:t>
             </a:r>
             <a:endParaRPr lang="en-US" sz="3600" dirty="0"/>
           </a:p>
@@ -15344,7 +15483,7 @@
               <a:buNone/>
             </a:pPr>
             <a:r>
-              <a:rPr lang="en-US" sz="4000" b="1" dirty="0">
+              <a:rPr lang="en-US" sz="4000" i="1" dirty="0">
                 <a:solidFill>
                   <a:srgbClr val="111111"/>
                 </a:solidFill>
@@ -15352,16 +15491,20 @@
                 <a:ea typeface="Times New Roman" pitchFamily="34" charset="-122"/>
                 <a:cs typeface="Times New Roman" pitchFamily="34" charset="-120"/>
               </a:rPr>
-              <a:t>Farmland: </a:t>
-            </a:r>
-            <a:pPr algn="l" indent="0" marL="0">
+              <a:t>These resources are exploited as follows:</a:t>
+            </a:r>
+            <a:endParaRPr lang="en-US" sz="4000" dirty="0"/>
+          </a:p>
+          <a:p>
+            <a:pPr algn="l" marL="342900" indent="-342900">
               <a:spcAft>
                 <a:spcPts val="800"/>
               </a:spcAft>
-              <a:buNone/>
+              <a:buSzPct val="100000"/>
+              <a:buChar char="•"/>
             </a:pPr>
             <a:r>
-              <a:rPr lang="en-US" sz="4000" dirty="0">
+              <a:rPr lang="en-US" sz="4000" b="1" dirty="0">
                 <a:solidFill>
                   <a:srgbClr val="111111"/>
                 </a:solidFill>
@@ -15369,19 +15512,17 @@
                 <a:ea typeface="Times New Roman" pitchFamily="34" charset="-122"/>
                 <a:cs typeface="Times New Roman" pitchFamily="34" charset="-120"/>
               </a:rPr>
-              <a:t>Farmers grow crops on small farms and companies grow them on large plantations.</a:t>
-            </a:r>
-            <a:endParaRPr lang="en-US" sz="4000" dirty="0"/>
-          </a:p>
-          <a:p>
-            <a:pPr algn="l" indent="0" marL="0">
+              <a:t>Timber: </a:t>
+            </a:r>
+            <a:pPr algn="l" marL="342900" indent="-342900">
               <a:spcAft>
                 <a:spcPts val="800"/>
               </a:spcAft>
-              <a:buNone/>
+              <a:buSzPct val="100000"/>
+              <a:buChar char="•"/>
             </a:pPr>
             <a:r>
-              <a:rPr lang="en-US" sz="4000" b="1" dirty="0">
+              <a:rPr lang="en-US" sz="4000" dirty="0">
                 <a:solidFill>
                   <a:srgbClr val="111111"/>
                 </a:solidFill>
@@ -15389,16 +15530,20 @@
                 <a:ea typeface="Times New Roman" pitchFamily="34" charset="-122"/>
                 <a:cs typeface="Times New Roman" pitchFamily="34" charset="-120"/>
               </a:rPr>
-              <a:t>Wildlife: </a:t>
-            </a:r>
-            <a:pPr algn="l" indent="0" marL="0">
+              <a:t>Trees are cut with chainsaws and sawn in sawmills.</a:t>
+            </a:r>
+            <a:endParaRPr lang="en-US" sz="4000" dirty="0"/>
+          </a:p>
+          <a:p>
+            <a:pPr algn="l" marL="342900" indent="-342900">
               <a:spcAft>
                 <a:spcPts val="800"/>
               </a:spcAft>
-              <a:buNone/>
+              <a:buSzPct val="100000"/>
+              <a:buChar char="•"/>
             </a:pPr>
             <a:r>
-              <a:rPr lang="en-US" sz="4000" dirty="0">
+              <a:rPr lang="en-US" sz="4000" b="1" dirty="0">
                 <a:solidFill>
                   <a:srgbClr val="111111"/>
                 </a:solidFill>
@@ -15406,7 +15551,25 @@
                 <a:ea typeface="Times New Roman" pitchFamily="34" charset="-122"/>
                 <a:cs typeface="Times New Roman" pitchFamily="34" charset="-120"/>
               </a:rPr>
-              <a:t>National parks such as the Dja and Lobéké attract tourists, and hunting is controlled by law.</a:t>
+              <a:t>Water: </a:t>
+            </a:r>
+            <a:pPr algn="l" marL="342900" indent="-342900">
+              <a:spcAft>
+                <a:spcPts val="800"/>
+              </a:spcAft>
+              <a:buSzPct val="100000"/>
+              <a:buChar char="•"/>
+            </a:pPr>
+            <a:r>
+              <a:rPr lang="en-US" sz="4000" dirty="0">
+                <a:solidFill>
+                  <a:srgbClr val="111111"/>
+                </a:solidFill>
+                <a:latin typeface="Times New Roman" pitchFamily="34" charset="0"/>
+                <a:ea typeface="Times New Roman" pitchFamily="34" charset="-122"/>
+                <a:cs typeface="Times New Roman" pitchFamily="34" charset="-120"/>
+              </a:rPr>
+              <a:t>Dams at Edéa and Song Loulou produce electricity.</a:t>
             </a:r>
             <a:endParaRPr lang="en-US" sz="4000" dirty="0"/>
           </a:p>
@@ -15518,15 +15681,117 @@
                 <a:ea typeface="Calibri" pitchFamily="34" charset="-122"/>
                 <a:cs typeface="Calibri" pitchFamily="34" charset="-120"/>
               </a:rPr>
-              <a:t>FORMATIVE EVALUATION</a:t>
+              <a:t>BOARD SUMMARY</a:t>
             </a:r>
             <a:endParaRPr lang="en-US" sz="1400" dirty="0"/>
+          </a:p>
+        </p:txBody>
+      </p:sp>
+      <p:sp>
+        <p:nvSpPr>
+          <p:cNvPr id="3" name="Text 1"/>
+          <p:cNvSpPr/>
+          <p:nvPr/>
+        </p:nvSpPr>
+        <p:spPr>
+          <a:xfrm>
+            <a:off x="365760" y="1005840"/>
+            <a:ext cx="11460175" cy="731520"/>
+          </a:xfrm>
+          <a:prstGeom prst="rect">
+            <a:avLst/>
+          </a:prstGeom>
+          <a:noFill/>
+          <a:ln/>
+        </p:spPr>
+        <p:txBody>
+          <a:bodyPr wrap="square" lIns="0" tIns="0" rIns="0" bIns="0" rtlCol="0" anchor="ctr">
+            <a:normAutofit/>
+          </a:bodyPr>
+          <a:lstStyle/>
+          <a:p>
+            <a:pPr algn="ctr" indent="0" marL="0">
+              <a:buNone/>
+            </a:pPr>
+            <a:r>
+              <a:rPr lang="en-US" sz="3600" b="1" dirty="0">
+                <a:solidFill>
+                  <a:srgbClr val="990011"/>
+                </a:solidFill>
+                <a:latin typeface="Times New Roman" pitchFamily="34" charset="0"/>
+                <a:ea typeface="Times New Roman" pitchFamily="34" charset="-122"/>
+                <a:cs typeface="Times New Roman" pitchFamily="34" charset="-120"/>
+              </a:rPr>
+              <a:t>2. Methods of Exploitation</a:t>
+            </a:r>
+            <a:endParaRPr lang="en-US" sz="3600" dirty="0"/>
+          </a:p>
+        </p:txBody>
+      </p:sp>
+      <p:sp>
+        <p:nvSpPr>
+          <p:cNvPr id="4" name="Text 2"/>
+          <p:cNvSpPr/>
+          <p:nvPr/>
+        </p:nvSpPr>
+        <p:spPr>
+          <a:xfrm>
+            <a:off x="365760" y="1783080"/>
+            <a:ext cx="4846320" cy="4617720"/>
+          </a:xfrm>
+          <a:prstGeom prst="rect">
+            <a:avLst/>
+          </a:prstGeom>
+          <a:noFill/>
+          <a:ln/>
+        </p:spPr>
+        <p:txBody>
+          <a:bodyPr wrap="square" lIns="0" tIns="0" rIns="0" bIns="0" rtlCol="0" anchor="t"/>
+          <a:lstStyle/>
+          <a:p>
+            <a:pPr algn="l" marL="342900" indent="-342900">
+              <a:spcAft>
+                <a:spcPts val="800"/>
+              </a:spcAft>
+              <a:buSzPct val="100000"/>
+              <a:buChar char="•"/>
+            </a:pPr>
+            <a:r>
+              <a:rPr lang="en-US" sz="3600" b="1" dirty="0">
+                <a:solidFill>
+                  <a:srgbClr val="111111"/>
+                </a:solidFill>
+                <a:latin typeface="Times New Roman" pitchFamily="34" charset="0"/>
+                <a:ea typeface="Times New Roman" pitchFamily="34" charset="-122"/>
+                <a:cs typeface="Times New Roman" pitchFamily="34" charset="-120"/>
+              </a:rPr>
+              <a:t>Minerals: </a:t>
+            </a:r>
+            <a:pPr algn="l" marL="342900" indent="-342900">
+              <a:spcAft>
+                <a:spcPts val="800"/>
+              </a:spcAft>
+              <a:buSzPct val="100000"/>
+              <a:buChar char="•"/>
+            </a:pPr>
+            <a:r>
+              <a:rPr lang="en-US" sz="3600" dirty="0">
+                <a:solidFill>
+                  <a:srgbClr val="111111"/>
+                </a:solidFill>
+                <a:latin typeface="Times New Roman" pitchFamily="34" charset="0"/>
+                <a:ea typeface="Times New Roman" pitchFamily="34" charset="-122"/>
+                <a:cs typeface="Times New Roman" pitchFamily="34" charset="-120"/>
+              </a:rPr>
+              <a:t>Oil is drilled near Kribi and Limbe, and gold is dug by hand in the East.</a:t>
+            </a:r>
+            <a:endParaRPr lang="en-US" sz="3600" dirty="0"/>
           </a:p>
         </p:txBody>
       </p:sp>
       <p:pic>
         <p:nvPicPr>
-          <p:cNvPr id="3" name="Image 0" descr="/home/claude/f4/img/minesec_sheet.png">    </p:cNvPr>
+          <p:cNvPr id="5" name="Image 0" descr="/home/claude/f4/img/v2/f2t_gold_mining.jpg">    </p:cNvPr>
           <p:cNvPicPr>
             <a:picLocks noChangeAspect="1"/>
           </p:cNvPicPr>
@@ -15540,8 +15805,8 @@
         </p:blipFill>
         <p:spPr>
           <a:xfrm>
-            <a:off x="0" y="658368"/>
-            <a:ext cx="5120640" cy="5833872"/>
+            <a:off x="5349240" y="2071212"/>
+            <a:ext cx="6659575" cy="3693983"/>
           </a:xfrm>
           <a:prstGeom prst="rect">
             <a:avLst/>
@@ -15550,14 +15815,14 @@
       </p:pic>
       <p:sp>
         <p:nvSpPr>
-          <p:cNvPr id="4" name="Text 1"/>
+          <p:cNvPr id="6" name="Text 3"/>
           <p:cNvSpPr/>
           <p:nvPr/>
         </p:nvSpPr>
         <p:spPr>
           <a:xfrm>
-            <a:off x="5349240" y="1005840"/>
-            <a:ext cx="6522415" cy="731520"/>
+            <a:off x="5349240" y="6089904"/>
+            <a:ext cx="6659575" cy="347472"/>
           </a:xfrm>
           <a:prstGeom prst="rect">
             <a:avLst/>
@@ -15566,68 +15831,24 @@
           <a:ln/>
         </p:spPr>
         <p:txBody>
-          <a:bodyPr wrap="square" lIns="0" tIns="0" rIns="0" bIns="0" rtlCol="0" anchor="ctr">
-            <a:normAutofit/>
-          </a:bodyPr>
+          <a:bodyPr wrap="square" lIns="0" tIns="0" rIns="0" bIns="0" rtlCol="0" anchor="ctr"/>
           <a:lstStyle/>
           <a:p>
             <a:pPr algn="ctr" indent="0" marL="0">
               <a:buNone/>
             </a:pPr>
             <a:r>
-              <a:rPr lang="en-US" sz="3600" b="1" dirty="0">
-                <a:solidFill>
-                  <a:srgbClr val="990011"/>
+              <a:rPr lang="en-US" sz="1600" i="1" dirty="0">
+                <a:solidFill>
+                  <a:srgbClr val="555555"/>
                 </a:solidFill>
                 <a:latin typeface="Times New Roman" pitchFamily="34" charset="0"/>
                 <a:ea typeface="Times New Roman" pitchFamily="34" charset="-122"/>
                 <a:cs typeface="Times New Roman" pitchFamily="34" charset="-120"/>
               </a:rPr>
-              <a:t>Evaluation 1</a:t>
-            </a:r>
-            <a:endParaRPr lang="en-US" sz="3600" dirty="0"/>
-          </a:p>
-        </p:txBody>
-      </p:sp>
-      <p:sp>
-        <p:nvSpPr>
-          <p:cNvPr id="5" name="Text 2"/>
-          <p:cNvSpPr/>
-          <p:nvPr/>
-        </p:nvSpPr>
-        <p:spPr>
-          <a:xfrm>
-            <a:off x="5349240" y="1783080"/>
-            <a:ext cx="6522415" cy="4663440"/>
-          </a:xfrm>
-          <a:prstGeom prst="rect">
-            <a:avLst/>
-          </a:prstGeom>
-          <a:noFill/>
-          <a:ln/>
-        </p:spPr>
-        <p:txBody>
-          <a:bodyPr wrap="square" lIns="0" tIns="0" rIns="0" bIns="0" rtlCol="0" anchor="t"/>
-          <a:lstStyle/>
-          <a:p>
-            <a:pPr algn="l" indent="0" marL="0">
-              <a:spcAft>
-                <a:spcPts val="800"/>
-              </a:spcAft>
-              <a:buNone/>
-            </a:pPr>
-            <a:r>
-              <a:rPr lang="en-US" sz="4000" dirty="0">
-                <a:solidFill>
-                  <a:srgbClr val="111111"/>
-                </a:solidFill>
-                <a:latin typeface="Times New Roman" pitchFamily="34" charset="0"/>
-                <a:ea typeface="Times New Roman" pitchFamily="34" charset="-122"/>
-                <a:cs typeface="Times New Roman" pitchFamily="34" charset="-120"/>
-              </a:rPr>
-              <a:t>Name four resources of the Equatorial region.</a:t>
-            </a:r>
-            <a:endParaRPr lang="en-US" sz="4000" dirty="0"/>
+              <a:t>Illustration: gold mining</a:t>
+            </a:r>
+            <a:endParaRPr lang="en-US" sz="1600" dirty="0"/>
           </a:p>
         </p:txBody>
       </p:sp>
@@ -15737,7 +15958,7 @@
                 <a:ea typeface="Calibri" pitchFamily="34" charset="-122"/>
                 <a:cs typeface="Calibri" pitchFamily="34" charset="-120"/>
               </a:rPr>
-              <a:t>FORMATIVE EVALUATION</a:t>
+              <a:t>BOARD SUMMARY</a:t>
             </a:r>
             <a:endParaRPr lang="en-US" sz="1400" dirty="0"/>
           </a:p>
@@ -15802,7 +16023,7 @@
                 <a:ea typeface="Times New Roman" pitchFamily="34" charset="-122"/>
                 <a:cs typeface="Times New Roman" pitchFamily="34" charset="-120"/>
               </a:rPr>
-              <a:t>Expected Answer</a:t>
+              <a:t>2. Methods of Exploitation</a:t>
             </a:r>
             <a:endParaRPr lang="en-US" sz="3600" dirty="0"/>
           </a:p>
@@ -15829,14 +16050,15 @@
           <a:bodyPr wrap="square" lIns="0" tIns="0" rIns="0" bIns="0" rtlCol="0" anchor="t"/>
           <a:lstStyle/>
           <a:p>
-            <a:pPr algn="l" indent="0" marL="0">
+            <a:pPr algn="l" marL="342900" indent="-342900">
               <a:spcAft>
                 <a:spcPts val="800"/>
               </a:spcAft>
-              <a:buNone/>
+              <a:buSzPct val="100000"/>
+              <a:buChar char="•"/>
             </a:pPr>
             <a:r>
-              <a:rPr lang="en-US" sz="4000" dirty="0">
+              <a:rPr lang="en-US" sz="4000" b="1" dirty="0">
                 <a:solidFill>
                   <a:srgbClr val="111111"/>
                 </a:solidFill>
@@ -15844,7 +16066,64 @@
                 <a:ea typeface="Times New Roman" pitchFamily="34" charset="-122"/>
                 <a:cs typeface="Times New Roman" pitchFamily="34" charset="-120"/>
               </a:rPr>
-              <a:t>Timber, water, minerals (oil, gold), farmland and wildlife.</a:t>
+              <a:t>Farmland: </a:t>
+            </a:r>
+            <a:pPr algn="l" marL="342900" indent="-342900">
+              <a:spcAft>
+                <a:spcPts val="800"/>
+              </a:spcAft>
+              <a:buSzPct val="100000"/>
+              <a:buChar char="•"/>
+            </a:pPr>
+            <a:r>
+              <a:rPr lang="en-US" sz="4000" dirty="0">
+                <a:solidFill>
+                  <a:srgbClr val="111111"/>
+                </a:solidFill>
+                <a:latin typeface="Times New Roman" pitchFamily="34" charset="0"/>
+                <a:ea typeface="Times New Roman" pitchFamily="34" charset="-122"/>
+                <a:cs typeface="Times New Roman" pitchFamily="34" charset="-120"/>
+              </a:rPr>
+              <a:t>Crops are grown on small farms and on large plantations.</a:t>
+            </a:r>
+            <a:endParaRPr lang="en-US" sz="4000" dirty="0"/>
+          </a:p>
+          <a:p>
+            <a:pPr algn="l" marL="342900" indent="-342900">
+              <a:spcAft>
+                <a:spcPts val="800"/>
+              </a:spcAft>
+              <a:buSzPct val="100000"/>
+              <a:buChar char="•"/>
+            </a:pPr>
+            <a:r>
+              <a:rPr lang="en-US" sz="4000" b="1" dirty="0">
+                <a:solidFill>
+                  <a:srgbClr val="111111"/>
+                </a:solidFill>
+                <a:latin typeface="Times New Roman" pitchFamily="34" charset="0"/>
+                <a:ea typeface="Times New Roman" pitchFamily="34" charset="-122"/>
+                <a:cs typeface="Times New Roman" pitchFamily="34" charset="-120"/>
+              </a:rPr>
+              <a:t>Wildlife: </a:t>
+            </a:r>
+            <a:pPr algn="l" marL="342900" indent="-342900">
+              <a:spcAft>
+                <a:spcPts val="800"/>
+              </a:spcAft>
+              <a:buSzPct val="100000"/>
+              <a:buChar char="•"/>
+            </a:pPr>
+            <a:r>
+              <a:rPr lang="en-US" sz="4000" dirty="0">
+                <a:solidFill>
+                  <a:srgbClr val="111111"/>
+                </a:solidFill>
+                <a:latin typeface="Times New Roman" pitchFamily="34" charset="0"/>
+                <a:ea typeface="Times New Roman" pitchFamily="34" charset="-122"/>
+                <a:cs typeface="Times New Roman" pitchFamily="34" charset="-120"/>
+              </a:rPr>
+              <a:t>National parks such as the Dja attract tourists.</a:t>
             </a:r>
             <a:endParaRPr lang="en-US" sz="4000" dirty="0"/>
           </a:p>
@@ -16021,7 +16300,7 @@
                 <a:ea typeface="Times New Roman" pitchFamily="34" charset="-122"/>
                 <a:cs typeface="Times New Roman" pitchFamily="34" charset="-120"/>
               </a:rPr>
-              <a:t>Evaluation 2</a:t>
+              <a:t>Evaluation 1</a:t>
             </a:r>
             <a:endParaRPr lang="en-US" sz="3600" dirty="0"/>
           </a:p>
@@ -16063,7 +16342,7 @@
                 <a:ea typeface="Times New Roman" pitchFamily="34" charset="-122"/>
                 <a:cs typeface="Times New Roman" pitchFamily="34" charset="-120"/>
               </a:rPr>
-              <a:t>How is timber exploited?</a:t>
+              <a:t>Name four resources of the Equatorial region.</a:t>
             </a:r>
             <a:endParaRPr lang="en-US" sz="4000" dirty="0"/>
           </a:p>
@@ -16282,7 +16561,7 @@
                 <a:ea typeface="Times New Roman" pitchFamily="34" charset="-122"/>
                 <a:cs typeface="Times New Roman" pitchFamily="34" charset="-120"/>
               </a:rPr>
-              <a:t>Trees are cut with chainsaws, carried by lorries and sawn in sawmills or exported.</a:t>
+              <a:t>Timber, water, minerals (oil, gold), farmland and wildlife.</a:t>
             </a:r>
             <a:endParaRPr lang="en-US" sz="4000" dirty="0"/>
           </a:p>
@@ -16394,7 +16673,7 @@
                 <a:ea typeface="Calibri" pitchFamily="34" charset="-122"/>
                 <a:cs typeface="Calibri" pitchFamily="34" charset="-120"/>
               </a:rPr>
-              <a:t>REMEDIATION</a:t>
+              <a:t>FORMATIVE EVALUATION</a:t>
             </a:r>
             <a:endParaRPr lang="en-US" sz="1400" dirty="0"/>
           </a:p>
@@ -16459,7 +16738,7 @@
                 <a:ea typeface="Times New Roman" pitchFamily="34" charset="-122"/>
                 <a:cs typeface="Times New Roman" pitchFamily="34" charset="-120"/>
               </a:rPr>
-              <a:t>Remediation</a:t>
+              <a:t>Evaluation 2</a:t>
             </a:r>
             <a:endParaRPr lang="en-US" sz="3600" dirty="0"/>
           </a:p>
@@ -16493,7 +16772,7 @@
               <a:buNone/>
             </a:pPr>
             <a:r>
-              <a:rPr lang="en-US" sz="4000" b="1" dirty="0">
+              <a:rPr lang="en-US" sz="4000" dirty="0">
                 <a:solidFill>
                   <a:srgbClr val="111111"/>
                 </a:solidFill>
@@ -16501,51 +16780,7 @@
                 <a:ea typeface="Times New Roman" pitchFamily="34" charset="-122"/>
                 <a:cs typeface="Times New Roman" pitchFamily="34" charset="-120"/>
               </a:rPr>
-              <a:t>Fill in the blanks:</a:t>
-            </a:r>
-            <a:endParaRPr lang="en-US" sz="4000" dirty="0"/>
-          </a:p>
-          <a:p>
-            <a:pPr algn="l" marL="342900" indent="-342900">
-              <a:spcAft>
-                <a:spcPts val="800"/>
-              </a:spcAft>
-              <a:buSzPct val="100000"/>
-              <a:buFont typeface="+mj-lt"/>
-              <a:buAutoNum type="arabicPeriod" startAt="1"/>
-            </a:pPr>
-            <a:r>
-              <a:rPr lang="en-US" sz="4000" dirty="0">
-                <a:solidFill>
-                  <a:srgbClr val="111111"/>
-                </a:solidFill>
-                <a:latin typeface="Times New Roman" pitchFamily="34" charset="0"/>
-                <a:ea typeface="Times New Roman" pitchFamily="34" charset="-122"/>
-                <a:cs typeface="Times New Roman" pitchFamily="34" charset="-120"/>
-              </a:rPr>
-              <a:t>Wood used for building and furniture is called ______.</a:t>
-            </a:r>
-            <a:endParaRPr lang="en-US" sz="4000" dirty="0"/>
-          </a:p>
-          <a:p>
-            <a:pPr algn="l" marL="342900" indent="-342900">
-              <a:spcAft>
-                <a:spcPts val="800"/>
-              </a:spcAft>
-              <a:buSzPct val="100000"/>
-              <a:buFont typeface="+mj-lt"/>
-              <a:buAutoNum type="arabicPeriod" startAt="1"/>
-            </a:pPr>
-            <a:r>
-              <a:rPr lang="en-US" sz="4000" dirty="0">
-                <a:solidFill>
-                  <a:srgbClr val="111111"/>
-                </a:solidFill>
-                <a:latin typeface="Times New Roman" pitchFamily="34" charset="0"/>
-                <a:ea typeface="Times New Roman" pitchFamily="34" charset="-122"/>
-                <a:cs typeface="Times New Roman" pitchFamily="34" charset="-120"/>
-              </a:rPr>
-              <a:t>The dams at Edéa and Song Loulou are on the River ______.</a:t>
+              <a:t>How is timber exploited?</a:t>
             </a:r>
             <a:endParaRPr lang="en-US" sz="4000" dirty="0"/>
           </a:p>
@@ -16657,7 +16892,7 @@
                 <a:ea typeface="Calibri" pitchFamily="34" charset="-122"/>
                 <a:cs typeface="Calibri" pitchFamily="34" charset="-120"/>
               </a:rPr>
-              <a:t>REMEDIATION</a:t>
+              <a:t>FORMATIVE EVALUATION</a:t>
             </a:r>
             <a:endParaRPr lang="en-US" sz="1400" dirty="0"/>
           </a:p>
@@ -16722,7 +16957,7 @@
                 <a:ea typeface="Times New Roman" pitchFamily="34" charset="-122"/>
                 <a:cs typeface="Times New Roman" pitchFamily="34" charset="-120"/>
               </a:rPr>
-              <a:t>Remediation (continued)</a:t>
+              <a:t>Expected Answer</a:t>
             </a:r>
             <a:endParaRPr lang="en-US" sz="3600" dirty="0"/>
           </a:p>
@@ -16749,13 +16984,11 @@
           <a:bodyPr wrap="square" lIns="0" tIns="0" rIns="0" bIns="0" rtlCol="0" anchor="t"/>
           <a:lstStyle/>
           <a:p>
-            <a:pPr algn="l" marL="342900" indent="-342900">
+            <a:pPr algn="l" indent="0" marL="0">
               <a:spcAft>
                 <a:spcPts val="800"/>
               </a:spcAft>
-              <a:buSzPct val="100000"/>
-              <a:buFont typeface="+mj-lt"/>
-              <a:buAutoNum type="arabicPeriod" startAt="1"/>
+              <a:buNone/>
             </a:pPr>
             <a:r>
               <a:rPr lang="en-US" sz="4000" dirty="0">
@@ -16766,7 +16999,7 @@
                 <a:ea typeface="Times New Roman" pitchFamily="34" charset="-122"/>
                 <a:cs typeface="Times New Roman" pitchFamily="34" charset="-120"/>
               </a:rPr>
-              <a:t>Oil is drilled under the sea near ______ and Limbe.</a:t>
+              <a:t>Trees are cut with chainsaws, carried by lorries and sawn in sawmills or exported.</a:t>
             </a:r>
             <a:endParaRPr lang="en-US" sz="4000" dirty="0"/>
           </a:p>
@@ -16878,7 +17111,7 @@
                 <a:ea typeface="Calibri" pitchFamily="34" charset="-122"/>
                 <a:cs typeface="Calibri" pitchFamily="34" charset="-120"/>
               </a:rPr>
-              <a:t>HOMEWORK</a:t>
+              <a:t>REMEDIATION</a:t>
             </a:r>
             <a:endParaRPr lang="en-US" sz="1400" dirty="0"/>
           </a:p>
@@ -16943,7 +17176,7 @@
                 <a:ea typeface="Times New Roman" pitchFamily="34" charset="-122"/>
                 <a:cs typeface="Times New Roman" pitchFamily="34" charset="-120"/>
               </a:rPr>
-              <a:t>Homework</a:t>
+              <a:t>Remediation</a:t>
             </a:r>
             <a:endParaRPr lang="en-US" sz="3600" dirty="0"/>
           </a:p>
@@ -16977,7 +17210,7 @@
               <a:buNone/>
             </a:pPr>
             <a:r>
-              <a:rPr lang="en-US" sz="4000" dirty="0">
+              <a:rPr lang="en-US" sz="4000" b="1" dirty="0">
                 <a:solidFill>
                   <a:srgbClr val="111111"/>
                 </a:solidFill>
@@ -16985,7 +17218,51 @@
                 <a:ea typeface="Times New Roman" pitchFamily="34" charset="-122"/>
                 <a:cs typeface="Times New Roman" pitchFamily="34" charset="-120"/>
               </a:rPr>
-              <a:t>Ask a farmer or a trader what crops come from the forest region of Cameroon. Write three food crops and two cash crops.</a:t>
+              <a:t>Fill in the blanks:</a:t>
+            </a:r>
+            <a:endParaRPr lang="en-US" sz="4000" dirty="0"/>
+          </a:p>
+          <a:p>
+            <a:pPr algn="l" marL="342900" indent="-342900">
+              <a:spcAft>
+                <a:spcPts val="800"/>
+              </a:spcAft>
+              <a:buSzPct val="100000"/>
+              <a:buFont typeface="+mj-lt"/>
+              <a:buAutoNum type="arabicPeriod" startAt="1"/>
+            </a:pPr>
+            <a:r>
+              <a:rPr lang="en-US" sz="4000" dirty="0">
+                <a:solidFill>
+                  <a:srgbClr val="111111"/>
+                </a:solidFill>
+                <a:latin typeface="Times New Roman" pitchFamily="34" charset="0"/>
+                <a:ea typeface="Times New Roman" pitchFamily="34" charset="-122"/>
+                <a:cs typeface="Times New Roman" pitchFamily="34" charset="-120"/>
+              </a:rPr>
+              <a:t>Wood used for building and furniture is called ______.</a:t>
+            </a:r>
+            <a:endParaRPr lang="en-US" sz="4000" dirty="0"/>
+          </a:p>
+          <a:p>
+            <a:pPr algn="l" marL="342900" indent="-342900">
+              <a:spcAft>
+                <a:spcPts val="800"/>
+              </a:spcAft>
+              <a:buSzPct val="100000"/>
+              <a:buFont typeface="+mj-lt"/>
+              <a:buAutoNum type="arabicPeriod" startAt="1"/>
+            </a:pPr>
+            <a:r>
+              <a:rPr lang="en-US" sz="4000" dirty="0">
+                <a:solidFill>
+                  <a:srgbClr val="111111"/>
+                </a:solidFill>
+                <a:latin typeface="Times New Roman" pitchFamily="34" charset="0"/>
+                <a:ea typeface="Times New Roman" pitchFamily="34" charset="-122"/>
+                <a:cs typeface="Times New Roman" pitchFamily="34" charset="-120"/>
+              </a:rPr>
+              <a:t>The dams at Edéa and Song Loulou are on the River ______.</a:t>
             </a:r>
             <a:endParaRPr lang="en-US" sz="4000" dirty="0"/>
           </a:p>
@@ -17097,7 +17374,7 @@
                 <a:ea typeface="Calibri" pitchFamily="34" charset="-122"/>
                 <a:cs typeface="Calibri" pitchFamily="34" charset="-120"/>
               </a:rPr>
-              <a:t>NEXT LESSON</a:t>
+              <a:t>REMEDIATION</a:t>
             </a:r>
             <a:endParaRPr lang="en-US" sz="1400" dirty="0"/>
           </a:p>
@@ -17162,7 +17439,7 @@
                 <a:ea typeface="Times New Roman" pitchFamily="34" charset="-122"/>
                 <a:cs typeface="Times New Roman" pitchFamily="34" charset="-120"/>
               </a:rPr>
-              <a:t>Next Lesson</a:t>
+              <a:t>Remediation (continued)</a:t>
             </a:r>
             <a:endParaRPr lang="en-US" sz="3600" dirty="0"/>
           </a:p>
@@ -17186,17 +17463,19 @@
           <a:ln/>
         </p:spPr>
         <p:txBody>
-          <a:bodyPr wrap="square" lIns="0" tIns="0" rIns="0" bIns="0" rtlCol="0" anchor="ctr"/>
-          <a:lstStyle/>
-          <a:p>
-            <a:pPr algn="ctr" indent="0" marL="0">
+          <a:bodyPr wrap="square" lIns="0" tIns="0" rIns="0" bIns="0" rtlCol="0" anchor="t"/>
+          <a:lstStyle/>
+          <a:p>
+            <a:pPr algn="l" marL="342900" indent="-342900">
               <a:spcAft>
                 <a:spcPts val="800"/>
               </a:spcAft>
-              <a:buNone/>
+              <a:buSzPct val="100000"/>
+              <a:buFont typeface="+mj-lt"/>
+              <a:buAutoNum type="arabicPeriod" startAt="1"/>
             </a:pPr>
             <a:r>
-              <a:rPr lang="en-US" sz="4000" b="1" dirty="0">
+              <a:rPr lang="en-US" sz="4000" dirty="0">
                 <a:solidFill>
                   <a:srgbClr val="111111"/>
                 </a:solidFill>
@@ -17204,27 +17483,7 @@
                 <a:ea typeface="Times New Roman" pitchFamily="34" charset="-122"/>
                 <a:cs typeface="Times New Roman" pitchFamily="34" charset="-120"/>
               </a:rPr>
-              <a:t>Our next lesson will be on:</a:t>
-            </a:r>
-            <a:endParaRPr lang="en-US" sz="4000" dirty="0"/>
-          </a:p>
-          <a:p>
-            <a:pPr algn="ctr" indent="0" marL="0">
-              <a:spcAft>
-                <a:spcPts val="800"/>
-              </a:spcAft>
-              <a:buNone/>
-            </a:pPr>
-            <a:r>
-              <a:rPr lang="en-US" sz="4000" b="1" dirty="0">
-                <a:solidFill>
-                  <a:srgbClr val="990011"/>
-                </a:solidFill>
-                <a:latin typeface="Times New Roman" pitchFamily="34" charset="0"/>
-                <a:ea typeface="Times New Roman" pitchFamily="34" charset="-122"/>
-                <a:cs typeface="Times New Roman" pitchFamily="34" charset="-120"/>
-              </a:rPr>
-              <a:t>Lesson 1 (Part 4): The Equatorial Region: Human Activities (Farming, Lumbering, Hunting and Others)</a:t>
+              <a:t>Oil is drilled under the sea near ______ and Limbe.</a:t>
             </a:r>
             <a:endParaRPr lang="en-US" sz="4000" dirty="0"/>
           </a:p>
@@ -17336,6 +17595,683 @@
                 <a:ea typeface="Calibri" pitchFamily="34" charset="-122"/>
                 <a:cs typeface="Calibri" pitchFamily="34" charset="-120"/>
               </a:rPr>
+              <a:t>HOMEWORK</a:t>
+            </a:r>
+            <a:endParaRPr lang="en-US" sz="1400" dirty="0"/>
+          </a:p>
+        </p:txBody>
+      </p:sp>
+      <p:pic>
+        <p:nvPicPr>
+          <p:cNvPr id="3" name="Image 0" descr="/home/claude/f4/img/minesec_sheet.png">    </p:cNvPr>
+          <p:cNvPicPr>
+            <a:picLocks noChangeAspect="1"/>
+          </p:cNvPicPr>
+          <p:nvPr/>
+        </p:nvPicPr>
+        <p:blipFill>
+          <a:blip r:embed="rId1"/>
+          <a:stretch>
+            <a:fillRect/>
+          </a:stretch>
+        </p:blipFill>
+        <p:spPr>
+          <a:xfrm>
+            <a:off x="0" y="658368"/>
+            <a:ext cx="5120640" cy="5833872"/>
+          </a:xfrm>
+          <a:prstGeom prst="rect">
+            <a:avLst/>
+          </a:prstGeom>
+        </p:spPr>
+      </p:pic>
+      <p:sp>
+        <p:nvSpPr>
+          <p:cNvPr id="4" name="Text 1"/>
+          <p:cNvSpPr/>
+          <p:nvPr/>
+        </p:nvSpPr>
+        <p:spPr>
+          <a:xfrm>
+            <a:off x="5349240" y="1005840"/>
+            <a:ext cx="6522415" cy="731520"/>
+          </a:xfrm>
+          <a:prstGeom prst="rect">
+            <a:avLst/>
+          </a:prstGeom>
+          <a:noFill/>
+          <a:ln/>
+        </p:spPr>
+        <p:txBody>
+          <a:bodyPr wrap="square" lIns="0" tIns="0" rIns="0" bIns="0" rtlCol="0" anchor="ctr">
+            <a:normAutofit/>
+          </a:bodyPr>
+          <a:lstStyle/>
+          <a:p>
+            <a:pPr algn="ctr" indent="0" marL="0">
+              <a:buNone/>
+            </a:pPr>
+            <a:r>
+              <a:rPr lang="en-US" sz="3600" b="1" dirty="0">
+                <a:solidFill>
+                  <a:srgbClr val="990011"/>
+                </a:solidFill>
+                <a:latin typeface="Times New Roman" pitchFamily="34" charset="0"/>
+                <a:ea typeface="Times New Roman" pitchFamily="34" charset="-122"/>
+                <a:cs typeface="Times New Roman" pitchFamily="34" charset="-120"/>
+              </a:rPr>
+              <a:t>Homework</a:t>
+            </a:r>
+            <a:endParaRPr lang="en-US" sz="3600" dirty="0"/>
+          </a:p>
+        </p:txBody>
+      </p:sp>
+      <p:sp>
+        <p:nvSpPr>
+          <p:cNvPr id="5" name="Text 2"/>
+          <p:cNvSpPr/>
+          <p:nvPr/>
+        </p:nvSpPr>
+        <p:spPr>
+          <a:xfrm>
+            <a:off x="5349240" y="1783080"/>
+            <a:ext cx="6522415" cy="4663440"/>
+          </a:xfrm>
+          <a:prstGeom prst="rect">
+            <a:avLst/>
+          </a:prstGeom>
+          <a:noFill/>
+          <a:ln/>
+        </p:spPr>
+        <p:txBody>
+          <a:bodyPr wrap="square" lIns="0" tIns="0" rIns="0" bIns="0" rtlCol="0" anchor="t"/>
+          <a:lstStyle/>
+          <a:p>
+            <a:pPr algn="l" indent="0" marL="0">
+              <a:spcAft>
+                <a:spcPts val="800"/>
+              </a:spcAft>
+              <a:buNone/>
+            </a:pPr>
+            <a:r>
+              <a:rPr lang="en-US" sz="4000" dirty="0">
+                <a:solidFill>
+                  <a:srgbClr val="111111"/>
+                </a:solidFill>
+                <a:latin typeface="Times New Roman" pitchFamily="34" charset="0"/>
+                <a:ea typeface="Times New Roman" pitchFamily="34" charset="-122"/>
+                <a:cs typeface="Times New Roman" pitchFamily="34" charset="-120"/>
+              </a:rPr>
+              <a:t>Ask a farmer or a trader what crops come from the forest region of Cameroon. Write three food crops and two cash crops.</a:t>
+            </a:r>
+            <a:endParaRPr lang="en-US" sz="4000" dirty="0"/>
+          </a:p>
+        </p:txBody>
+      </p:sp>
+      <p:sp>
+        <p:nvSpPr>
+          <p:cNvPr id="25" name="Slide Number Placeholder 0"/>
+          <p:cNvSpPr>
+            <a:spLocks noGrp="1"/>
+          </p:cNvSpPr>
+          <p:nvPr>
+            <p:ph type="sldNum" sz="quarter" idx="4294967295"/>
+          </p:nvPr>
+        </p:nvSpPr>
+        <p:spPr>
+          <a:xfrm>
+            <a:off x="27432" y="91440"/>
+            <a:ext cx="585216" cy="475488"/>
+          </a:xfrm>
+          <a:prstGeom prst="rect">
+            <a:avLst/>
+          </a:prstGeom>
+          <a:extLst>
+            <a:ext uri="{C572A759-6A51-4108-AA02-DFA0A04FC94B}">
+              <ma14:wrappingTextBoxFlag xmlns:ma14="http://schemas.microsoft.com/office/mac/drawingml/2011/main" val="0"/>
+            </a:ext>
+          </a:extLst>
+        </p:spPr>
+        <p:txBody>
+          <a:bodyPr/>
+          <a:lstStyle>
+            <a:lvl1pPr>
+              <a:defRPr sz="2000">
+                <a:solidFill>
+                  <a:srgbClr val="FFFFFF"/>
+                </a:solidFill>
+                <a:latin typeface="Calibri"/>
+                <a:ea typeface="Calibri"/>
+                <a:cs typeface="Calibri"/>
+              </a:defRPr>
+            </a:lvl1pPr>
+          </a:lstStyle>
+          <a:p>
+            <a:pPr algn="ctr"/>
+            <a:fld id="{F7021451-1387-4CA6-816F-3879F97B5CBC}" type="slidenum">
+              <a:rPr b="1" lang="en-US"/>
+              <a:t>49</a:t>
+            </a:fld>
+            <a:endParaRPr lang="en-US"/>
+          </a:p>
+        </p:txBody>
+      </p:sp>
+    </p:spTree>
+  </p:cSld>
+  <p:clrMapOvr>
+    <a:masterClrMapping/>
+  </p:clrMapOvr>
+</p:sld>
+</file>
+
+<file path=ppt/slides/slide5.xml><?xml version="1.0" encoding="utf-8"?>
+<p:sld xmlns:a="http://schemas.openxmlformats.org/drawingml/2006/main" xmlns:r="http://schemas.openxmlformats.org/officeDocument/2006/relationships" xmlns:p="http://schemas.openxmlformats.org/presentationml/2006/main">
+  <p:cSld name="Slide 5">
+    <p:spTree>
+      <p:nvGrpSpPr>
+        <p:cNvPr id="1" name=""/>
+        <p:cNvGrpSpPr/>
+        <p:nvPr/>
+      </p:nvGrpSpPr>
+      <p:grpSpPr>
+        <a:xfrm>
+          <a:off x="0" y="0"/>
+          <a:ext cx="0" cy="0"/>
+          <a:chOff x="0" y="0"/>
+          <a:chExt cx="0" cy="0"/>
+        </a:xfrm>
+      </p:grpSpPr>
+      <p:sp>
+        <p:nvSpPr>
+          <p:cNvPr id="2" name="Text 0"/>
+          <p:cNvSpPr/>
+          <p:nvPr/>
+        </p:nvSpPr>
+        <p:spPr>
+          <a:xfrm>
+            <a:off x="457200" y="713232"/>
+            <a:ext cx="11368735" cy="274320"/>
+          </a:xfrm>
+          <a:prstGeom prst="rect">
+            <a:avLst/>
+          </a:prstGeom>
+          <a:noFill/>
+          <a:ln/>
+        </p:spPr>
+        <p:txBody>
+          <a:bodyPr wrap="square" lIns="0" tIns="0" rIns="0" bIns="0" rtlCol="0" anchor="ctr"/>
+          <a:lstStyle/>
+          <a:p>
+            <a:pPr algn="r" indent="0" marL="0">
+              <a:buNone/>
+            </a:pPr>
+            <a:r>
+              <a:rPr lang="en-US" sz="1400" b="1" dirty="0">
+                <a:solidFill>
+                  <a:srgbClr val="1C3F6E"/>
+                </a:solidFill>
+                <a:latin typeface="Calibri" pitchFamily="34" charset="0"/>
+                <a:ea typeface="Calibri" pitchFamily="34" charset="-122"/>
+                <a:cs typeface="Calibri" pitchFamily="34" charset="-120"/>
+              </a:rPr>
+              <a:t>HOMEWORK CORRECTION</a:t>
+            </a:r>
+            <a:endParaRPr lang="en-US" sz="1400" dirty="0"/>
+          </a:p>
+        </p:txBody>
+      </p:sp>
+      <p:pic>
+        <p:nvPicPr>
+          <p:cNvPr id="3" name="Image 0" descr="/home/claude/f4/img/minesec_sheet.png">    </p:cNvPr>
+          <p:cNvPicPr>
+            <a:picLocks noChangeAspect="1"/>
+          </p:cNvPicPr>
+          <p:nvPr/>
+        </p:nvPicPr>
+        <p:blipFill>
+          <a:blip r:embed="rId1"/>
+          <a:stretch>
+            <a:fillRect/>
+          </a:stretch>
+        </p:blipFill>
+        <p:spPr>
+          <a:xfrm>
+            <a:off x="0" y="658368"/>
+            <a:ext cx="5120640" cy="5833872"/>
+          </a:xfrm>
+          <a:prstGeom prst="rect">
+            <a:avLst/>
+          </a:prstGeom>
+        </p:spPr>
+      </p:pic>
+      <p:sp>
+        <p:nvSpPr>
+          <p:cNvPr id="4" name="Text 1"/>
+          <p:cNvSpPr/>
+          <p:nvPr/>
+        </p:nvSpPr>
+        <p:spPr>
+          <a:xfrm>
+            <a:off x="5349240" y="1005840"/>
+            <a:ext cx="6522415" cy="731520"/>
+          </a:xfrm>
+          <a:prstGeom prst="rect">
+            <a:avLst/>
+          </a:prstGeom>
+          <a:noFill/>
+          <a:ln/>
+        </p:spPr>
+        <p:txBody>
+          <a:bodyPr wrap="square" lIns="0" tIns="0" rIns="0" bIns="0" rtlCol="0" anchor="ctr">
+            <a:normAutofit/>
+          </a:bodyPr>
+          <a:lstStyle/>
+          <a:p>
+            <a:pPr algn="ctr" indent="0" marL="0">
+              <a:buNone/>
+            </a:pPr>
+            <a:r>
+              <a:rPr lang="en-US" sz="3600" b="1" dirty="0">
+                <a:solidFill>
+                  <a:srgbClr val="990011"/>
+                </a:solidFill>
+                <a:latin typeface="Times New Roman" pitchFamily="34" charset="0"/>
+                <a:ea typeface="Times New Roman" pitchFamily="34" charset="-122"/>
+                <a:cs typeface="Times New Roman" pitchFamily="34" charset="-120"/>
+              </a:rPr>
+              <a:t>Correction: Possible Answer</a:t>
+            </a:r>
+            <a:endParaRPr lang="en-US" sz="3600" dirty="0"/>
+          </a:p>
+        </p:txBody>
+      </p:sp>
+      <p:sp>
+        <p:nvSpPr>
+          <p:cNvPr id="5" name="Text 2"/>
+          <p:cNvSpPr/>
+          <p:nvPr/>
+        </p:nvSpPr>
+        <p:spPr>
+          <a:xfrm>
+            <a:off x="5349240" y="1783080"/>
+            <a:ext cx="6522415" cy="4663440"/>
+          </a:xfrm>
+          <a:prstGeom prst="rect">
+            <a:avLst/>
+          </a:prstGeom>
+          <a:noFill/>
+          <a:ln/>
+        </p:spPr>
+        <p:txBody>
+          <a:bodyPr wrap="square" lIns="0" tIns="0" rIns="0" bIns="0" rtlCol="0" anchor="t"/>
+          <a:lstStyle/>
+          <a:p>
+            <a:pPr algn="l" indent="0" marL="0">
+              <a:spcAft>
+                <a:spcPts val="800"/>
+              </a:spcAft>
+              <a:buNone/>
+            </a:pPr>
+            <a:r>
+              <a:rPr lang="en-US" sz="4000" dirty="0">
+                <a:solidFill>
+                  <a:srgbClr val="111111"/>
+                </a:solidFill>
+                <a:latin typeface="Times New Roman" pitchFamily="34" charset="0"/>
+                <a:ea typeface="Times New Roman" pitchFamily="34" charset="-122"/>
+                <a:cs typeface="Times New Roman" pitchFamily="34" charset="-120"/>
+              </a:rPr>
+              <a:t>Examples: timber (planks and furniture), plantains, cocoa (chocolate and cocoa drinks), palm oil, bush mango (ndo'o) and eru.</a:t>
+            </a:r>
+            <a:endParaRPr lang="en-US" sz="4000" dirty="0"/>
+          </a:p>
+        </p:txBody>
+      </p:sp>
+      <p:sp>
+        <p:nvSpPr>
+          <p:cNvPr id="25" name="Slide Number Placeholder 0"/>
+          <p:cNvSpPr>
+            <a:spLocks noGrp="1"/>
+          </p:cNvSpPr>
+          <p:nvPr>
+            <p:ph type="sldNum" sz="quarter" idx="4294967295"/>
+          </p:nvPr>
+        </p:nvSpPr>
+        <p:spPr>
+          <a:xfrm>
+            <a:off x="27432" y="91440"/>
+            <a:ext cx="585216" cy="475488"/>
+          </a:xfrm>
+          <a:prstGeom prst="rect">
+            <a:avLst/>
+          </a:prstGeom>
+          <a:extLst>
+            <a:ext uri="{C572A759-6A51-4108-AA02-DFA0A04FC94B}">
+              <ma14:wrappingTextBoxFlag xmlns:ma14="http://schemas.microsoft.com/office/mac/drawingml/2011/main" val="0"/>
+            </a:ext>
+          </a:extLst>
+        </p:spPr>
+        <p:txBody>
+          <a:bodyPr/>
+          <a:lstStyle>
+            <a:lvl1pPr>
+              <a:defRPr sz="2000">
+                <a:solidFill>
+                  <a:srgbClr val="FFFFFF"/>
+                </a:solidFill>
+                <a:latin typeface="Calibri"/>
+                <a:ea typeface="Calibri"/>
+                <a:cs typeface="Calibri"/>
+              </a:defRPr>
+            </a:lvl1pPr>
+          </a:lstStyle>
+          <a:p>
+            <a:pPr algn="ctr"/>
+            <a:fld id="{F7021451-1387-4CA6-816F-3879F97B5CBC}" type="slidenum">
+              <a:rPr b="1" lang="en-US"/>
+              <a:t>5</a:t>
+            </a:fld>
+            <a:endParaRPr lang="en-US"/>
+          </a:p>
+        </p:txBody>
+      </p:sp>
+    </p:spTree>
+  </p:cSld>
+  <p:clrMapOvr>
+    <a:masterClrMapping/>
+  </p:clrMapOvr>
+</p:sld>
+</file>
+
+<file path=ppt/slides/slide50.xml><?xml version="1.0" encoding="utf-8"?>
+<p:sld xmlns:a="http://schemas.openxmlformats.org/drawingml/2006/main" xmlns:r="http://schemas.openxmlformats.org/officeDocument/2006/relationships" xmlns:p="http://schemas.openxmlformats.org/presentationml/2006/main">
+  <p:cSld name="Slide 50">
+    <p:spTree>
+      <p:nvGrpSpPr>
+        <p:cNvPr id="1" name=""/>
+        <p:cNvGrpSpPr/>
+        <p:nvPr/>
+      </p:nvGrpSpPr>
+      <p:grpSpPr>
+        <a:xfrm>
+          <a:off x="0" y="0"/>
+          <a:ext cx="0" cy="0"/>
+          <a:chOff x="0" y="0"/>
+          <a:chExt cx="0" cy="0"/>
+        </a:xfrm>
+      </p:grpSpPr>
+      <p:sp>
+        <p:nvSpPr>
+          <p:cNvPr id="2" name="Text 0"/>
+          <p:cNvSpPr/>
+          <p:nvPr/>
+        </p:nvSpPr>
+        <p:spPr>
+          <a:xfrm>
+            <a:off x="457200" y="713232"/>
+            <a:ext cx="11368735" cy="274320"/>
+          </a:xfrm>
+          <a:prstGeom prst="rect">
+            <a:avLst/>
+          </a:prstGeom>
+          <a:noFill/>
+          <a:ln/>
+        </p:spPr>
+        <p:txBody>
+          <a:bodyPr wrap="square" lIns="0" tIns="0" rIns="0" bIns="0" rtlCol="0" anchor="ctr"/>
+          <a:lstStyle/>
+          <a:p>
+            <a:pPr algn="r" indent="0" marL="0">
+              <a:buNone/>
+            </a:pPr>
+            <a:r>
+              <a:rPr lang="en-US" sz="1400" b="1" dirty="0">
+                <a:solidFill>
+                  <a:srgbClr val="1C3F6E"/>
+                </a:solidFill>
+                <a:latin typeface="Calibri" pitchFamily="34" charset="0"/>
+                <a:ea typeface="Calibri" pitchFamily="34" charset="-122"/>
+                <a:cs typeface="Calibri" pitchFamily="34" charset="-120"/>
+              </a:rPr>
+              <a:t>NEXT LESSON</a:t>
+            </a:r>
+            <a:endParaRPr lang="en-US" sz="1400" dirty="0"/>
+          </a:p>
+        </p:txBody>
+      </p:sp>
+      <p:pic>
+        <p:nvPicPr>
+          <p:cNvPr id="3" name="Image 0" descr="/home/claude/f4/img/minesec_sheet.png">    </p:cNvPr>
+          <p:cNvPicPr>
+            <a:picLocks noChangeAspect="1"/>
+          </p:cNvPicPr>
+          <p:nvPr/>
+        </p:nvPicPr>
+        <p:blipFill>
+          <a:blip r:embed="rId1"/>
+          <a:stretch>
+            <a:fillRect/>
+          </a:stretch>
+        </p:blipFill>
+        <p:spPr>
+          <a:xfrm>
+            <a:off x="0" y="658368"/>
+            <a:ext cx="5120640" cy="5833872"/>
+          </a:xfrm>
+          <a:prstGeom prst="rect">
+            <a:avLst/>
+          </a:prstGeom>
+        </p:spPr>
+      </p:pic>
+      <p:sp>
+        <p:nvSpPr>
+          <p:cNvPr id="4" name="Text 1"/>
+          <p:cNvSpPr/>
+          <p:nvPr/>
+        </p:nvSpPr>
+        <p:spPr>
+          <a:xfrm>
+            <a:off x="5349240" y="1005840"/>
+            <a:ext cx="6522415" cy="731520"/>
+          </a:xfrm>
+          <a:prstGeom prst="rect">
+            <a:avLst/>
+          </a:prstGeom>
+          <a:noFill/>
+          <a:ln/>
+        </p:spPr>
+        <p:txBody>
+          <a:bodyPr wrap="square" lIns="0" tIns="0" rIns="0" bIns="0" rtlCol="0" anchor="ctr">
+            <a:normAutofit/>
+          </a:bodyPr>
+          <a:lstStyle/>
+          <a:p>
+            <a:pPr algn="ctr" indent="0" marL="0">
+              <a:buNone/>
+            </a:pPr>
+            <a:r>
+              <a:rPr lang="en-US" sz="3600" b="1" dirty="0">
+                <a:solidFill>
+                  <a:srgbClr val="990011"/>
+                </a:solidFill>
+                <a:latin typeface="Times New Roman" pitchFamily="34" charset="0"/>
+                <a:ea typeface="Times New Roman" pitchFamily="34" charset="-122"/>
+                <a:cs typeface="Times New Roman" pitchFamily="34" charset="-120"/>
+              </a:rPr>
+              <a:t>Next Lesson</a:t>
+            </a:r>
+            <a:endParaRPr lang="en-US" sz="3600" dirty="0"/>
+          </a:p>
+        </p:txBody>
+      </p:sp>
+      <p:sp>
+        <p:nvSpPr>
+          <p:cNvPr id="5" name="Text 2"/>
+          <p:cNvSpPr/>
+          <p:nvPr/>
+        </p:nvSpPr>
+        <p:spPr>
+          <a:xfrm>
+            <a:off x="5349240" y="1783080"/>
+            <a:ext cx="6522415" cy="4663440"/>
+          </a:xfrm>
+          <a:prstGeom prst="rect">
+            <a:avLst/>
+          </a:prstGeom>
+          <a:noFill/>
+          <a:ln/>
+        </p:spPr>
+        <p:txBody>
+          <a:bodyPr wrap="square" lIns="0" tIns="0" rIns="0" bIns="0" rtlCol="0" anchor="ctr"/>
+          <a:lstStyle/>
+          <a:p>
+            <a:pPr algn="ctr" indent="0" marL="0">
+              <a:spcAft>
+                <a:spcPts val="800"/>
+              </a:spcAft>
+              <a:buNone/>
+            </a:pPr>
+            <a:r>
+              <a:rPr lang="en-US" sz="4000" b="1" dirty="0">
+                <a:solidFill>
+                  <a:srgbClr val="111111"/>
+                </a:solidFill>
+                <a:latin typeface="Times New Roman" pitchFamily="34" charset="0"/>
+                <a:ea typeface="Times New Roman" pitchFamily="34" charset="-122"/>
+                <a:cs typeface="Times New Roman" pitchFamily="34" charset="-120"/>
+              </a:rPr>
+              <a:t>Our next lesson will be on:</a:t>
+            </a:r>
+            <a:endParaRPr lang="en-US" sz="4000" dirty="0"/>
+          </a:p>
+          <a:p>
+            <a:pPr algn="ctr" indent="0" marL="0">
+              <a:spcAft>
+                <a:spcPts val="800"/>
+              </a:spcAft>
+              <a:buNone/>
+            </a:pPr>
+            <a:r>
+              <a:rPr lang="en-US" sz="4000" b="1" dirty="0">
+                <a:solidFill>
+                  <a:srgbClr val="990011"/>
+                </a:solidFill>
+                <a:latin typeface="Times New Roman" pitchFamily="34" charset="0"/>
+                <a:ea typeface="Times New Roman" pitchFamily="34" charset="-122"/>
+                <a:cs typeface="Times New Roman" pitchFamily="34" charset="-120"/>
+              </a:rPr>
+              <a:t>Lesson 1 (Part 4): The Equatorial Region: Human Activities (Farming, Lumbering, Hunting and Others)</a:t>
+            </a:r>
+            <a:endParaRPr lang="en-US" sz="4000" dirty="0"/>
+          </a:p>
+        </p:txBody>
+      </p:sp>
+      <p:sp>
+        <p:nvSpPr>
+          <p:cNvPr id="25" name="Slide Number Placeholder 0"/>
+          <p:cNvSpPr>
+            <a:spLocks noGrp="1"/>
+          </p:cNvSpPr>
+          <p:nvPr>
+            <p:ph type="sldNum" sz="quarter" idx="4294967295"/>
+          </p:nvPr>
+        </p:nvSpPr>
+        <p:spPr>
+          <a:xfrm>
+            <a:off x="27432" y="91440"/>
+            <a:ext cx="585216" cy="475488"/>
+          </a:xfrm>
+          <a:prstGeom prst="rect">
+            <a:avLst/>
+          </a:prstGeom>
+          <a:extLst>
+            <a:ext uri="{C572A759-6A51-4108-AA02-DFA0A04FC94B}">
+              <ma14:wrappingTextBoxFlag xmlns:ma14="http://schemas.microsoft.com/office/mac/drawingml/2011/main" val="0"/>
+            </a:ext>
+          </a:extLst>
+        </p:spPr>
+        <p:txBody>
+          <a:bodyPr/>
+          <a:lstStyle>
+            <a:lvl1pPr>
+              <a:defRPr sz="2000">
+                <a:solidFill>
+                  <a:srgbClr val="FFFFFF"/>
+                </a:solidFill>
+                <a:latin typeface="Calibri"/>
+                <a:ea typeface="Calibri"/>
+                <a:cs typeface="Calibri"/>
+              </a:defRPr>
+            </a:lvl1pPr>
+          </a:lstStyle>
+          <a:p>
+            <a:pPr algn="ctr"/>
+            <a:fld id="{F7021451-1387-4CA6-816F-3879F97B5CBC}" type="slidenum">
+              <a:rPr b="1" lang="en-US"/>
+              <a:t>50</a:t>
+            </a:fld>
+            <a:endParaRPr lang="en-US"/>
+          </a:p>
+        </p:txBody>
+      </p:sp>
+    </p:spTree>
+  </p:cSld>
+  <p:clrMapOvr>
+    <a:masterClrMapping/>
+  </p:clrMapOvr>
+</p:sld>
+</file>
+
+<file path=ppt/slides/slide51.xml><?xml version="1.0" encoding="utf-8"?>
+<p:sld xmlns:a="http://schemas.openxmlformats.org/drawingml/2006/main" xmlns:r="http://schemas.openxmlformats.org/officeDocument/2006/relationships" xmlns:p="http://schemas.openxmlformats.org/presentationml/2006/main">
+  <p:cSld name="Slide 51">
+    <p:spTree>
+      <p:nvGrpSpPr>
+        <p:cNvPr id="1" name=""/>
+        <p:cNvGrpSpPr/>
+        <p:nvPr/>
+      </p:nvGrpSpPr>
+      <p:grpSpPr>
+        <a:xfrm>
+          <a:off x="0" y="0"/>
+          <a:ext cx="0" cy="0"/>
+          <a:chOff x="0" y="0"/>
+          <a:chExt cx="0" cy="0"/>
+        </a:xfrm>
+      </p:grpSpPr>
+      <p:sp>
+        <p:nvSpPr>
+          <p:cNvPr id="2" name="Text 0"/>
+          <p:cNvSpPr/>
+          <p:nvPr/>
+        </p:nvSpPr>
+        <p:spPr>
+          <a:xfrm>
+            <a:off x="457200" y="713232"/>
+            <a:ext cx="11368735" cy="274320"/>
+          </a:xfrm>
+          <a:prstGeom prst="rect">
+            <a:avLst/>
+          </a:prstGeom>
+          <a:noFill/>
+          <a:ln/>
+        </p:spPr>
+        <p:txBody>
+          <a:bodyPr wrap="square" lIns="0" tIns="0" rIns="0" bIns="0" rtlCol="0" anchor="ctr"/>
+          <a:lstStyle/>
+          <a:p>
+            <a:pPr algn="r" indent="0" marL="0">
+              <a:buNone/>
+            </a:pPr>
+            <a:r>
+              <a:rPr lang="en-US" sz="1400" b="1" dirty="0">
+                <a:solidFill>
+                  <a:srgbClr val="1C3F6E"/>
+                </a:solidFill>
+                <a:latin typeface="Calibri" pitchFamily="34" charset="0"/>
+                <a:ea typeface="Calibri" pitchFamily="34" charset="-122"/>
+                <a:cs typeface="Calibri" pitchFamily="34" charset="-120"/>
+              </a:rPr>
               <a:t>BILINGUAL GAME</a:t>
             </a:r>
             <a:endParaRPr lang="en-US" sz="1400" dirty="0"/>
@@ -17383,7 +18319,7 @@
       </p:sp>
       <p:graphicFrame>
         <p:nvGraphicFramePr>
-          <p:cNvPr id="50" name="Table 0"/>
+          <p:cNvPr id="52" name="Table 0"/>
           <p:cNvGraphicFramePr>
             <a:graphicFrameLocks noGrp="1"/>
           </p:cNvGraphicFramePr>
@@ -18419,7 +19355,7 @@
             <a:pPr algn="ctr"/>
             <a:fld id="{F7021451-1387-4CA6-816F-3879F97B5CBC}" type="slidenum">
               <a:rPr b="1" lang="en-US"/>
-              <a:t>49</a:t>
+              <a:t>51</a:t>
             </a:fld>
             <a:endParaRPr lang="en-US"/>
           </a:p>
@@ -18433,9 +19369,9 @@
 </p:sld>
 </file>
 
-<file path=ppt/slides/slide5.xml><?xml version="1.0" encoding="utf-8"?>
+<file path=ppt/slides/slide52.xml><?xml version="1.0" encoding="utf-8"?>
 <p:sld xmlns:a="http://schemas.openxmlformats.org/drawingml/2006/main" xmlns:r="http://schemas.openxmlformats.org/officeDocument/2006/relationships" xmlns:p="http://schemas.openxmlformats.org/presentationml/2006/main">
-  <p:cSld name="Slide 5">
+  <p:cSld name="Slide 52">
     <p:spTree>
       <p:nvGrpSpPr>
         <p:cNvPr id="1" name=""/>
@@ -18483,225 +19419,6 @@
                 <a:ea typeface="Calibri" pitchFamily="34" charset="-122"/>
                 <a:cs typeface="Calibri" pitchFamily="34" charset="-120"/>
               </a:rPr>
-              <a:t>HOMEWORK CORRECTION</a:t>
-            </a:r>
-            <a:endParaRPr lang="en-US" sz="1400" dirty="0"/>
-          </a:p>
-        </p:txBody>
-      </p:sp>
-      <p:pic>
-        <p:nvPicPr>
-          <p:cNvPr id="3" name="Image 0" descr="/home/claude/f4/img/minesec_sheet.png">    </p:cNvPr>
-          <p:cNvPicPr>
-            <a:picLocks noChangeAspect="1"/>
-          </p:cNvPicPr>
-          <p:nvPr/>
-        </p:nvPicPr>
-        <p:blipFill>
-          <a:blip r:embed="rId1"/>
-          <a:stretch>
-            <a:fillRect/>
-          </a:stretch>
-        </p:blipFill>
-        <p:spPr>
-          <a:xfrm>
-            <a:off x="0" y="658368"/>
-            <a:ext cx="5120640" cy="5833872"/>
-          </a:xfrm>
-          <a:prstGeom prst="rect">
-            <a:avLst/>
-          </a:prstGeom>
-        </p:spPr>
-      </p:pic>
-      <p:sp>
-        <p:nvSpPr>
-          <p:cNvPr id="4" name="Text 1"/>
-          <p:cNvSpPr/>
-          <p:nvPr/>
-        </p:nvSpPr>
-        <p:spPr>
-          <a:xfrm>
-            <a:off x="5349240" y="1005840"/>
-            <a:ext cx="6522415" cy="731520"/>
-          </a:xfrm>
-          <a:prstGeom prst="rect">
-            <a:avLst/>
-          </a:prstGeom>
-          <a:noFill/>
-          <a:ln/>
-        </p:spPr>
-        <p:txBody>
-          <a:bodyPr wrap="square" lIns="0" tIns="0" rIns="0" bIns="0" rtlCol="0" anchor="ctr">
-            <a:normAutofit/>
-          </a:bodyPr>
-          <a:lstStyle/>
-          <a:p>
-            <a:pPr algn="ctr" indent="0" marL="0">
-              <a:buNone/>
-            </a:pPr>
-            <a:r>
-              <a:rPr lang="en-US" sz="3600" b="1" dirty="0">
-                <a:solidFill>
-                  <a:srgbClr val="990011"/>
-                </a:solidFill>
-                <a:latin typeface="Times New Roman" pitchFamily="34" charset="0"/>
-                <a:ea typeface="Times New Roman" pitchFamily="34" charset="-122"/>
-                <a:cs typeface="Times New Roman" pitchFamily="34" charset="-120"/>
-              </a:rPr>
-              <a:t>Correction: Possible Answer</a:t>
-            </a:r>
-            <a:endParaRPr lang="en-US" sz="3600" dirty="0"/>
-          </a:p>
-        </p:txBody>
-      </p:sp>
-      <p:sp>
-        <p:nvSpPr>
-          <p:cNvPr id="5" name="Text 2"/>
-          <p:cNvSpPr/>
-          <p:nvPr/>
-        </p:nvSpPr>
-        <p:spPr>
-          <a:xfrm>
-            <a:off x="5349240" y="1783080"/>
-            <a:ext cx="6522415" cy="4663440"/>
-          </a:xfrm>
-          <a:prstGeom prst="rect">
-            <a:avLst/>
-          </a:prstGeom>
-          <a:noFill/>
-          <a:ln/>
-        </p:spPr>
-        <p:txBody>
-          <a:bodyPr wrap="square" lIns="0" tIns="0" rIns="0" bIns="0" rtlCol="0" anchor="t"/>
-          <a:lstStyle/>
-          <a:p>
-            <a:pPr algn="l" indent="0" marL="0">
-              <a:spcAft>
-                <a:spcPts val="800"/>
-              </a:spcAft>
-              <a:buNone/>
-            </a:pPr>
-            <a:r>
-              <a:rPr lang="en-US" sz="4000" dirty="0">
-                <a:solidFill>
-                  <a:srgbClr val="111111"/>
-                </a:solidFill>
-                <a:latin typeface="Times New Roman" pitchFamily="34" charset="0"/>
-                <a:ea typeface="Times New Roman" pitchFamily="34" charset="-122"/>
-                <a:cs typeface="Times New Roman" pitchFamily="34" charset="-120"/>
-              </a:rPr>
-              <a:t>Examples: timber (planks and furniture), plantains, cocoa (chocolate and cocoa drinks), palm oil, bush mango (ndo'o) and eru.</a:t>
-            </a:r>
-            <a:endParaRPr lang="en-US" sz="4000" dirty="0"/>
-          </a:p>
-        </p:txBody>
-      </p:sp>
-      <p:sp>
-        <p:nvSpPr>
-          <p:cNvPr id="25" name="Slide Number Placeholder 0"/>
-          <p:cNvSpPr>
-            <a:spLocks noGrp="1"/>
-          </p:cNvSpPr>
-          <p:nvPr>
-            <p:ph type="sldNum" sz="quarter" idx="4294967295"/>
-          </p:nvPr>
-        </p:nvSpPr>
-        <p:spPr>
-          <a:xfrm>
-            <a:off x="27432" y="91440"/>
-            <a:ext cx="585216" cy="475488"/>
-          </a:xfrm>
-          <a:prstGeom prst="rect">
-            <a:avLst/>
-          </a:prstGeom>
-          <a:extLst>
-            <a:ext uri="{C572A759-6A51-4108-AA02-DFA0A04FC94B}">
-              <ma14:wrappingTextBoxFlag xmlns:ma14="http://schemas.microsoft.com/office/mac/drawingml/2011/main" val="0"/>
-            </a:ext>
-          </a:extLst>
-        </p:spPr>
-        <p:txBody>
-          <a:bodyPr/>
-          <a:lstStyle>
-            <a:lvl1pPr>
-              <a:defRPr sz="2000">
-                <a:solidFill>
-                  <a:srgbClr val="FFFFFF"/>
-                </a:solidFill>
-                <a:latin typeface="Calibri"/>
-                <a:ea typeface="Calibri"/>
-                <a:cs typeface="Calibri"/>
-              </a:defRPr>
-            </a:lvl1pPr>
-          </a:lstStyle>
-          <a:p>
-            <a:pPr algn="ctr"/>
-            <a:fld id="{F7021451-1387-4CA6-816F-3879F97B5CBC}" type="slidenum">
-              <a:rPr b="1" lang="en-US"/>
-              <a:t>5</a:t>
-            </a:fld>
-            <a:endParaRPr lang="en-US"/>
-          </a:p>
-        </p:txBody>
-      </p:sp>
-    </p:spTree>
-  </p:cSld>
-  <p:clrMapOvr>
-    <a:masterClrMapping/>
-  </p:clrMapOvr>
-</p:sld>
-</file>
-
-<file path=ppt/slides/slide50.xml><?xml version="1.0" encoding="utf-8"?>
-<p:sld xmlns:a="http://schemas.openxmlformats.org/drawingml/2006/main" xmlns:r="http://schemas.openxmlformats.org/officeDocument/2006/relationships" xmlns:p="http://schemas.openxmlformats.org/presentationml/2006/main">
-  <p:cSld name="Slide 50">
-    <p:spTree>
-      <p:nvGrpSpPr>
-        <p:cNvPr id="1" name=""/>
-        <p:cNvGrpSpPr/>
-        <p:nvPr/>
-      </p:nvGrpSpPr>
-      <p:grpSpPr>
-        <a:xfrm>
-          <a:off x="0" y="0"/>
-          <a:ext cx="0" cy="0"/>
-          <a:chOff x="0" y="0"/>
-          <a:chExt cx="0" cy="0"/>
-        </a:xfrm>
-      </p:grpSpPr>
-      <p:sp>
-        <p:nvSpPr>
-          <p:cNvPr id="2" name="Text 0"/>
-          <p:cNvSpPr/>
-          <p:nvPr/>
-        </p:nvSpPr>
-        <p:spPr>
-          <a:xfrm>
-            <a:off x="457200" y="713232"/>
-            <a:ext cx="11368735" cy="274320"/>
-          </a:xfrm>
-          <a:prstGeom prst="rect">
-            <a:avLst/>
-          </a:prstGeom>
-          <a:noFill/>
-          <a:ln/>
-        </p:spPr>
-        <p:txBody>
-          <a:bodyPr wrap="square" lIns="0" tIns="0" rIns="0" bIns="0" rtlCol="0" anchor="ctr"/>
-          <a:lstStyle/>
-          <a:p>
-            <a:pPr algn="r" indent="0" marL="0">
-              <a:buNone/>
-            </a:pPr>
-            <a:r>
-              <a:rPr lang="en-US" sz="1400" b="1" dirty="0">
-                <a:solidFill>
-                  <a:srgbClr val="1C3F6E"/>
-                </a:solidFill>
-                <a:latin typeface="Calibri" pitchFamily="34" charset="0"/>
-                <a:ea typeface="Calibri" pitchFamily="34" charset="-122"/>
-                <a:cs typeface="Calibri" pitchFamily="34" charset="-120"/>
-              </a:rPr>
               <a:t>LOGBOOK</a:t>
             </a:r>
             <a:endParaRPr lang="en-US" sz="1400" dirty="0"/>
@@ -18749,7 +19466,7 @@
       </p:sp>
       <p:graphicFrame>
         <p:nvGraphicFramePr>
-          <p:cNvPr id="51" name="Table 0"/>
+          <p:cNvPr id="53" name="Table 0"/>
           <p:cNvGraphicFramePr>
             <a:graphicFrameLocks noGrp="1"/>
           </p:cNvGraphicFramePr>
@@ -19371,7 +20088,7 @@
             <a:pPr algn="ctr"/>
             <a:fld id="{F7021451-1387-4CA6-816F-3879F97B5CBC}" type="slidenum">
               <a:rPr b="1" lang="en-US"/>
-              <a:t>50</a:t>
+              <a:t>52</a:t>
             </a:fld>
             <a:endParaRPr lang="en-US"/>
           </a:p>
@@ -19385,9 +20102,9 @@
 </p:sld>
 </file>
 
-<file path=ppt/slides/slide51.xml><?xml version="1.0" encoding="utf-8"?>
+<file path=ppt/slides/slide53.xml><?xml version="1.0" encoding="utf-8"?>
 <p:sld xmlns:a="http://schemas.openxmlformats.org/drawingml/2006/main" xmlns:r="http://schemas.openxmlformats.org/officeDocument/2006/relationships" xmlns:p="http://schemas.openxmlformats.org/presentationml/2006/main">
-  <p:cSld name="Slide 51">
+  <p:cSld name="Slide 53">
     <p:spTree>
       <p:nvGrpSpPr>
         <p:cNvPr id="1" name=""/>
@@ -19482,7 +20199,7 @@
       </p:sp>
       <p:graphicFrame>
         <p:nvGraphicFramePr>
-          <p:cNvPr id="52" name="Table 0"/>
+          <p:cNvPr id="54" name="Table 0"/>
           <p:cNvGraphicFramePr>
             <a:graphicFrameLocks noGrp="1"/>
           </p:cNvGraphicFramePr>
@@ -20242,7 +20959,7 @@
             <a:pPr algn="ctr"/>
             <a:fld id="{F7021451-1387-4CA6-816F-3879F97B5CBC}" type="slidenum">
               <a:rPr b="1" lang="en-US"/>
-              <a:t>51</a:t>
+              <a:t>53</a:t>
             </a:fld>
             <a:endParaRPr lang="en-US"/>
           </a:p>
@@ -20256,9 +20973,9 @@
 </p:sld>
 </file>
 
-<file path=ppt/slides/slide52.xml><?xml version="1.0" encoding="utf-8"?>
+<file path=ppt/slides/slide54.xml><?xml version="1.0" encoding="utf-8"?>
 <p:sld xmlns:a="http://schemas.openxmlformats.org/drawingml/2006/main" xmlns:r="http://schemas.openxmlformats.org/officeDocument/2006/relationships" xmlns:p="http://schemas.openxmlformats.org/presentationml/2006/main">
-  <p:cSld name="Slide 52">
+  <p:cSld name="Slide 54">
     <p:spTree>
       <p:nvGrpSpPr>
         <p:cNvPr id="1" name=""/>
@@ -20329,7 +21046,7 @@
         <p:spPr>
           <a:xfrm>
             <a:off x="0" y="658368"/>
-            <a:ext cx="1463040" cy="5833872"/>
+            <a:ext cx="2468880" cy="5833872"/>
           </a:xfrm>
           <a:prstGeom prst="rect">
             <a:avLst/>
@@ -20344,8 +21061,8 @@
         </p:nvSpPr>
         <p:spPr>
           <a:xfrm>
-            <a:off x="1691640" y="1005840"/>
-            <a:ext cx="10180015" cy="731520"/>
+            <a:off x="2697480" y="1005840"/>
+            <a:ext cx="9174175" cy="731520"/>
           </a:xfrm>
           <a:prstGeom prst="rect">
             <a:avLst/>
@@ -20385,8 +21102,8 @@
         </p:nvSpPr>
         <p:spPr>
           <a:xfrm>
-            <a:off x="1691640" y="1783080"/>
-            <a:ext cx="10180015" cy="4663440"/>
+            <a:off x="2697480" y="1783080"/>
+            <a:ext cx="9174175" cy="4663440"/>
           </a:xfrm>
           <a:prstGeom prst="rect">
             <a:avLst/>
@@ -20456,7 +21173,7 @@
                 <a:ea typeface="Calibri" pitchFamily="34" charset="-122"/>
                 <a:cs typeface="Calibri" pitchFamily="34" charset="-120"/>
               </a:rPr>
-              <a:t>Without the projector (Activity 1): name objects in the classroom made of wood.</a:t>
+              <a:t>Without the projector (Activity 1): name furniture made of wood.</a:t>
             </a:r>
             <a:endParaRPr lang="en-US" sz="2000" dirty="0"/>
           </a:p>
@@ -20477,7 +21194,7 @@
                 <a:ea typeface="Calibri" pitchFamily="34" charset="-122"/>
                 <a:cs typeface="Calibri" pitchFamily="34" charset="-120"/>
               </a:rPr>
-              <a:t>Without the projector (Activity 2): ask where the electricity of Garoua comes from.</a:t>
+              <a:t>Without the projector (Activity 2): name products made with cocoa.</a:t>
             </a:r>
             <a:endParaRPr lang="en-US" sz="2000" dirty="0"/>
           </a:p>
@@ -20498,7 +21215,7 @@
                 <a:ea typeface="Calibri" pitchFamily="34" charset="-122"/>
                 <a:cs typeface="Calibri" pitchFamily="34" charset="-120"/>
               </a:rPr>
-              <a:t>Without the projector (Activity 3): list the minerals learners know.</a:t>
+              <a:t>Without the projector (Activity 3): describe a dam.</a:t>
             </a:r>
             <a:endParaRPr lang="en-US" sz="2000" dirty="0"/>
           </a:p>
@@ -20519,7 +21236,7 @@
                 <a:ea typeface="Calibri" pitchFamily="34" charset="-122"/>
                 <a:cs typeface="Calibri" pitchFamily="34" charset="-120"/>
               </a:rPr>
-              <a:t>Without the projector (Activity 4): show a chocolate wrapper.</a:t>
+              <a:t>Without the projector (Activity 4): ask what gold is used for.</a:t>
             </a:r>
             <a:endParaRPr lang="en-US" sz="2000" dirty="0"/>
           </a:p>
@@ -20540,7 +21257,7 @@
                 <a:ea typeface="Calibri" pitchFamily="34" charset="-122"/>
                 <a:cs typeface="Calibri" pitchFamily="34" charset="-120"/>
               </a:rPr>
-              <a:t>Without the projector (Activity 5): name animals of the forest.</a:t>
+              <a:t>Without the projector (Activity 5): name national parks.</a:t>
             </a:r>
             <a:endParaRPr lang="en-US" sz="2000" dirty="0"/>
           </a:p>
@@ -20588,7 +21305,7 @@
             <a:pPr algn="ctr"/>
             <a:fld id="{F7021451-1387-4CA6-816F-3879F97B5CBC}" type="slidenum">
               <a:rPr b="1" lang="en-US"/>
-              <a:t>52</a:t>
+              <a:t>54</a:t>
             </a:fld>
             <a:endParaRPr lang="en-US"/>
           </a:p>
@@ -20602,9 +21319,9 @@
 </p:sld>
 </file>
 
-<file path=ppt/slides/slide53.xml><?xml version="1.0" encoding="utf-8"?>
+<file path=ppt/slides/slide55.xml><?xml version="1.0" encoding="utf-8"?>
 <p:sld xmlns:a="http://schemas.openxmlformats.org/drawingml/2006/main" xmlns:r="http://schemas.openxmlformats.org/officeDocument/2006/relationships" xmlns:p="http://schemas.openxmlformats.org/presentationml/2006/main">
-  <p:cSld name="Slide 53">
+  <p:cSld name="Slide 55">
     <p:spTree>
       <p:nvGrpSpPr>
         <p:cNvPr id="1" name=""/>
@@ -20823,7 +21540,7 @@
                 <a:ea typeface="Calibri" pitchFamily="34" charset="-122"/>
                 <a:cs typeface="Calibri" pitchFamily="34" charset="-120"/>
               </a:rPr>
-              <a:t>Photo, Activity 2: “South Holston Lake, (Virginia-Tennessee border, USA)” by James St. John, CC BY 2.0, via Flickr (https://www.flickr.com/photos/47445767@N05/39221734762)</a:t>
+              <a:t>Photo, Activity 2: “Farmer sun drying cocoa beans” by IITA Image Library, CC BY-NC 2.0, via Flickr (https://www.flickr.com/photos/45796762@N03/4598613756)</a:t>
             </a:r>
             <a:endParaRPr lang="en-US" sz="1800" dirty="0"/>
           </a:p>
@@ -20844,7 +21561,7 @@
                 <a:ea typeface="Calibri" pitchFamily="34" charset="-122"/>
                 <a:cs typeface="Calibri" pitchFamily="34" charset="-120"/>
               </a:rPr>
-              <a:t>Photo, Activity 3: “Mining in Kailo” by Julien Harneis, CC BY-SA 2.0, via Flickr (https://www.flickr.com/photos/16935515@N00/1872000955)</a:t>
+              <a:t>Photo, Activity 3: “South Holston Lake, (Virginia-Tennessee border, USA)” by James St. John, CC BY 2.0, via Flickr (https://www.flickr.com/photos/47445767@N05/39221734762)</a:t>
             </a:r>
             <a:endParaRPr lang="en-US" sz="1800" dirty="0"/>
           </a:p>
@@ -20865,7 +21582,7 @@
                 <a:ea typeface="Calibri" pitchFamily="34" charset="-122"/>
                 <a:cs typeface="Calibri" pitchFamily="34" charset="-120"/>
               </a:rPr>
-              <a:t>Photo, Activity 4: “Farmer sun drying cocoa beans” by IITA Image Library, CC BY-NC 2.0, via Flickr (https://www.flickr.com/photos/45796762@N03/4598613756)</a:t>
+              <a:t>Photo, Activity 4: “Mining in Kailo” by Julien Harneis, CC BY-SA 2.0, via Flickr (https://www.flickr.com/photos/16935515@N00/1872000955)</a:t>
             </a:r>
             <a:endParaRPr lang="en-US" sz="1800" dirty="0"/>
           </a:p>
@@ -20955,7 +21672,7 @@
             <a:pPr algn="ctr"/>
             <a:fld id="{F7021451-1387-4CA6-816F-3879F97B5CBC}" type="slidenum">
               <a:rPr b="1" lang="en-US"/>
-              <a:t>53</a:t>
+              <a:t>55</a:t>
             </a:fld>
             <a:endParaRPr lang="en-US"/>
           </a:p>

--- a/lecons/F2T/03_F2T_L1_P3_Equatorial_Resources.pptx
+++ b/lecons/F2T/03_F2T_L1_P3_Equatorial_Resources.pptx
@@ -3460,7 +3460,7 @@
           <a:p>
             <a:r>
               <a:rPr lang="en-US" dirty="0"/>
-              <a:t>Before we start the new lesson, let us correct the homework I gave you at the end of Lesson 1 (Part 2): The Equatorial Region: Characteristics (Soils and Vegetation). The question was: List three products from the forest of southern Cameroon that are sold in the market of Garoua (for example timber, plantains or cocoa products). Take out your exercise books.</a:t>
+              <a:t>Before we start the new lesson, let us correct the homework I gave you at the end of Lesson 1 (Part 2): The Equatorial Region: Characteristics (Soils and Vegetation). The question was: Name three resources of the equatorial region. Take out your exercise books.</a:t>
             </a:r>
             <a:endParaRPr lang="en-US" dirty="0"/>
           </a:p>
@@ -4340,7 +4340,7 @@
           <a:p>
             <a:r>
               <a:rPr lang="en-US" dirty="0"/>
-              <a:t>For your homework: Ask a farmer or a trader what crops come from the forest region of Cameroon. Write three food crops and two cash crops. We shall correct it at the beginning of our next lesson.</a:t>
+              <a:t>For your homework: Define shifting cultivation. We shall correct it at the beginning of our next lesson.</a:t>
             </a:r>
             <a:endParaRPr lang="en-US" dirty="0"/>
           </a:p>
@@ -4428,7 +4428,7 @@
           <a:p>
             <a:r>
               <a:rPr lang="en-US" dirty="0"/>
-              <a:t>Here is a good answer. Examples: timber (planks and furniture), plantains, cocoa (chocolate and cocoa drinks), palm oil, bush mango (ndo'o) and eru. Compare it with your own answer and correct your work in red.</a:t>
+              <a:t>Here is a good answer. Timber, minerals and water (also farmland and wildlife). Compare it with your own answer and correct your work in red.</a:t>
             </a:r>
             <a:endParaRPr lang="en-US" dirty="0"/>
           </a:p>
@@ -15168,7 +15168,7 @@
         <p:spPr>
           <a:xfrm>
             <a:off x="0" y="658368"/>
-            <a:ext cx="2468880" cy="5833872"/>
+            <a:ext cx="5120640" cy="5833872"/>
           </a:xfrm>
           <a:prstGeom prst="rect">
             <a:avLst/>
@@ -15183,8 +15183,8 @@
         </p:nvSpPr>
         <p:spPr>
           <a:xfrm>
-            <a:off x="2697480" y="1005840"/>
-            <a:ext cx="9174175" cy="731520"/>
+            <a:off x="5349240" y="1005840"/>
+            <a:ext cx="6522415" cy="731520"/>
           </a:xfrm>
           <a:prstGeom prst="rect">
             <a:avLst/>
@@ -15224,8 +15224,8 @@
         </p:nvSpPr>
         <p:spPr>
           <a:xfrm>
-            <a:off x="2697480" y="1783080"/>
-            <a:ext cx="9174175" cy="4663440"/>
+            <a:off x="5349240" y="1783080"/>
+            <a:ext cx="6522415" cy="4663440"/>
           </a:xfrm>
           <a:prstGeom prst="rect">
             <a:avLst/>
@@ -15272,7 +15272,7 @@
                 <a:ea typeface="Times New Roman" pitchFamily="34" charset="-122"/>
                 <a:cs typeface="Times New Roman" pitchFamily="34" charset="-120"/>
               </a:rPr>
-              <a:t>List three products from the forest of southern Cameroon that are sold in the market of Garoua (for example timber, plantains or cocoa products).</a:t>
+              <a:t>Name three resources of the equatorial region.</a:t>
             </a:r>
             <a:endParaRPr lang="en-US" sz="4000" dirty="0"/>
           </a:p>
@@ -17702,7 +17702,7 @@
                 <a:ea typeface="Times New Roman" pitchFamily="34" charset="-122"/>
                 <a:cs typeface="Times New Roman" pitchFamily="34" charset="-120"/>
               </a:rPr>
-              <a:t>Ask a farmer or a trader what crops come from the forest region of Cameroon. Write three food crops and two cash crops.</a:t>
+              <a:t>Define shifting cultivation.</a:t>
             </a:r>
             <a:endParaRPr lang="en-US" sz="4000" dirty="0"/>
           </a:p>
@@ -17921,7 +17921,7 @@
                 <a:ea typeface="Times New Roman" pitchFamily="34" charset="-122"/>
                 <a:cs typeface="Times New Roman" pitchFamily="34" charset="-120"/>
               </a:rPr>
-              <a:t>Examples: timber (planks and furniture), plantains, cocoa (chocolate and cocoa drinks), palm oil, bush mango (ndo'o) and eru.</a:t>
+              <a:t>Timber, minerals and water (also farmland and wildlife).</a:t>
             </a:r>
             <a:endParaRPr lang="en-US" sz="4000" dirty="0"/>
           </a:p>
@@ -20585,7 +20585,7 @@
                           <a:ea typeface="Calibri" pitchFamily="34" charset="-122"/>
                           <a:cs typeface="Calibri" pitchFamily="34" charset="-120"/>
                         </a:rPr>
-                        <a:t>Ask a farmer or a trader what crops come from the forest region of Cameroon. Write three food crops and two cash crops.</a:t>
+                        <a:t>Define shifting cultivation.</a:t>
                       </a:r>
                       <a:endParaRPr lang="en-US" sz="1600" dirty="0">
                         <a:latin typeface="Calibri" charset="0"/>
